--- a/templates/PPT_template/Business_Template.pptx
+++ b/templates/PPT_template/Business_Template.pptx
@@ -3098,7 +3098,7 @@
     <p:bg>
       <p:bgPr>
         <a:solidFill>
-          <a:srgbClr val="0F2B4C"/>
+          <a:srgbClr val="FFFFFF"/>
         </a:solidFill>
         <a:effectLst/>
       </p:bgPr>
@@ -3112,16 +3112,60 @@
       <p:grpSpPr/>
       <p:sp>
         <p:nvSpPr>
-          <p:cNvPr id="2" name="Oval 1"/>
+          <p:cNvPr id="2" name="Rectangle 1"/>
           <p:cNvSpPr/>
           <p:nvPr/>
         </p:nvSpPr>
         <p:spPr>
           <a:xfrm>
-            <a:off x="8595360" y="-1463040"/>
-            <a:ext cx="4572000" cy="4572000"/>
-          </a:xfrm>
-          <a:prstGeom prst="ellipse">
+            <a:off x="0" y="0"/>
+            <a:ext cx="12191695" cy="320040"/>
+          </a:xfrm>
+          <a:prstGeom prst="rect">
+            <a:avLst/>
+          </a:prstGeom>
+          <a:solidFill>
+            <a:srgbClr val="0F2B4C"/>
+          </a:solidFill>
+          <a:ln>
+            <a:noFill/>
+          </a:ln>
+          <a:effectLst/>
+        </p:spPr>
+        <p:style>
+          <a:lnRef idx="1">
+            <a:schemeClr val="accent1"/>
+          </a:lnRef>
+          <a:fillRef idx="3">
+            <a:schemeClr val="accent1"/>
+          </a:fillRef>
+          <a:effectRef idx="2">
+            <a:schemeClr val="accent1"/>
+          </a:effectRef>
+          <a:fontRef idx="minor">
+            <a:schemeClr val="lt1"/>
+          </a:fontRef>
+        </p:style>
+        <p:txBody>
+          <a:bodyPr rtlCol="0" anchor="ctr"/>
+          <a:lstStyle/>
+          <a:p>
+            <a:pPr algn="ctr"/>
+          </a:p>
+        </p:txBody>
+      </p:sp>
+      <p:sp>
+        <p:nvSpPr>
+          <p:cNvPr id="3" name="Rectangle 2"/>
+          <p:cNvSpPr/>
+          <p:nvPr/>
+        </p:nvSpPr>
+        <p:spPr>
+          <a:xfrm>
+            <a:off x="914400" y="3611880"/>
+            <a:ext cx="2011680" cy="82296"/>
+          </a:xfrm>
+          <a:prstGeom prst="rect">
             <a:avLst/>
           </a:prstGeom>
           <a:solidFill>
@@ -3156,58 +3200,14 @@
       </p:sp>
       <p:sp>
         <p:nvSpPr>
-          <p:cNvPr id="3" name="Rectangle 2"/>
-          <p:cNvSpPr/>
-          <p:nvPr/>
-        </p:nvSpPr>
-        <p:spPr>
-          <a:xfrm>
-            <a:off x="0" y="0"/>
-            <a:ext cx="146304" cy="6858000"/>
-          </a:xfrm>
-          <a:prstGeom prst="rect">
-            <a:avLst/>
-          </a:prstGeom>
-          <a:solidFill>
-            <a:srgbClr val="E3E8EE"/>
-          </a:solidFill>
-          <a:ln>
-            <a:noFill/>
-          </a:ln>
-          <a:effectLst/>
-        </p:spPr>
-        <p:style>
-          <a:lnRef idx="1">
-            <a:schemeClr val="accent1"/>
-          </a:lnRef>
-          <a:fillRef idx="3">
-            <a:schemeClr val="accent1"/>
-          </a:fillRef>
-          <a:effectRef idx="2">
-            <a:schemeClr val="accent1"/>
-          </a:effectRef>
-          <a:fontRef idx="minor">
-            <a:schemeClr val="lt1"/>
-          </a:fontRef>
-        </p:style>
-        <p:txBody>
-          <a:bodyPr rtlCol="0" anchor="ctr"/>
-          <a:lstStyle/>
-          <a:p>
-            <a:pPr algn="ctr"/>
-          </a:p>
-        </p:txBody>
-      </p:sp>
-      <p:sp>
-        <p:nvSpPr>
           <p:cNvPr id="4" name="TextBox 3"/>
           <p:cNvSpPr txBox="1"/>
           <p:nvPr/>
         </p:nvSpPr>
         <p:spPr>
           <a:xfrm>
-            <a:off x="868680" y="6263640"/>
-            <a:ext cx="5486400" cy="365760"/>
+            <a:off x="914400" y="6309360"/>
+            <a:ext cx="3657600" cy="365760"/>
           </a:xfrm>
           <a:prstGeom prst="rect">
             <a:avLst/>
@@ -3224,7 +3224,7 @@
             <a:r>
               <a:rPr sz="1000" b="0">
                 <a:solidFill>
-                  <a:srgbClr val="FFFFFF"/>
+                  <a:srgbClr val="6A7280"/>
                 </a:solidFill>
                 <a:latin typeface="Microsoft YaHei"/>
               </a:rPr>
@@ -3241,8 +3241,8 @@
         </p:nvSpPr>
         <p:spPr>
           <a:xfrm>
-            <a:off x="914400" y="1828800"/>
-            <a:ext cx="10332720" cy="1737360"/>
+            <a:off x="914400" y="2286000"/>
+            <a:ext cx="10332720" cy="1280160"/>
           </a:xfrm>
           <a:prstGeom prst="rect">
             <a:avLst/>
@@ -3257,9 +3257,9 @@
           <a:p>
             <a:pPr algn="l"/>
             <a:r>
-              <a:rPr sz="4000" b="1" i="0">
-                <a:solidFill>
-                  <a:srgbClr val="FFFFFF"/>
+              <a:rPr sz="4400" b="1" i="0">
+                <a:solidFill>
+                  <a:srgbClr val="0F2B4C"/>
                 </a:solidFill>
                 <a:latin typeface="Microsoft YaHei"/>
               </a:rPr>
@@ -3276,8 +3276,8 @@
         </p:nvSpPr>
         <p:spPr>
           <a:xfrm>
-            <a:off x="914400" y="3749039"/>
-            <a:ext cx="10332720" cy="822960"/>
+            <a:off x="914400" y="3840480"/>
+            <a:ext cx="10332720" cy="731520"/>
           </a:xfrm>
           <a:prstGeom prst="rect">
             <a:avLst/>
@@ -3292,9 +3292,9 @@
           <a:p>
             <a:pPr algn="l"/>
             <a:r>
-              <a:rPr sz="2000" b="0" i="0">
-                <a:solidFill>
-                  <a:srgbClr val="FFFFFF"/>
+              <a:rPr sz="2200" b="0" i="0">
+                <a:solidFill>
+                  <a:srgbClr val="6A7280"/>
                 </a:solidFill>
                 <a:latin typeface="Microsoft YaHei"/>
               </a:rPr>
@@ -3338,7 +3338,7 @@
         <p:spPr>
           <a:xfrm>
             <a:off x="0" y="0"/>
-            <a:ext cx="118872" cy="6858000"/>
+            <a:ext cx="12191695" cy="91440"/>
           </a:xfrm>
           <a:prstGeom prst="rect">
             <a:avLst/>
@@ -3375,119 +3375,14 @@
       </p:sp>
       <p:sp>
         <p:nvSpPr>
-          <p:cNvPr id="3" name="TextBox 2"/>
-          <p:cNvSpPr txBox="1"/>
-          <p:nvPr/>
-        </p:nvSpPr>
-        <p:spPr>
-          <a:xfrm>
-            <a:off x="457200" y="6419088"/>
-            <a:ext cx="3657600" cy="274320"/>
-          </a:xfrm>
-          <a:prstGeom prst="rect">
-            <a:avLst/>
-          </a:prstGeom>
-          <a:noFill/>
-        </p:spPr>
-        <p:txBody>
-          <a:bodyPr wrap="none">
-            <a:spAutoFit/>
-          </a:bodyPr>
-          <a:lstStyle/>
-          <a:p>
-            <a:pPr algn="l"/>
-            <a:r>
-              <a:rPr sz="900" b="0">
-                <a:solidFill>
-                  <a:srgbClr val="6A7280"/>
-                </a:solidFill>
-                <a:latin typeface="Microsoft YaHei"/>
-              </a:rPr>
-              <a:t>LESSONFORGE 微课</a:t>
-            </a:r>
-          </a:p>
-        </p:txBody>
-      </p:sp>
-      <p:sp>
-        <p:nvSpPr>
-          <p:cNvPr id="4" name="TextBox 3"/>
-          <p:cNvSpPr txBox="1"/>
-          <p:nvPr/>
-        </p:nvSpPr>
-        <p:spPr>
-          <a:xfrm>
-            <a:off x="10607040" y="6419088"/>
-            <a:ext cx="1097280" cy="274320"/>
-          </a:xfrm>
-          <a:prstGeom prst="rect">
-            <a:avLst/>
-          </a:prstGeom>
-          <a:noFill/>
-        </p:spPr>
-        <p:txBody>
-          <a:bodyPr wrap="none">
-            <a:spAutoFit/>
-          </a:bodyPr>
-          <a:lstStyle/>
-          <a:p>
-            <a:pPr algn="r"/>
-            <a:r>
-              <a:rPr sz="1000" b="1">
-                <a:solidFill>
-                  <a:srgbClr val="6A7280"/>
-                </a:solidFill>
-                <a:latin typeface="Microsoft YaHei"/>
-              </a:rPr>
-              <a:t>10</a:t>
-            </a:r>
-          </a:p>
-        </p:txBody>
-      </p:sp>
-      <p:sp>
-        <p:nvSpPr>
-          <p:cNvPr id="5" name="TextBox 4"/>
-          <p:cNvSpPr txBox="1"/>
-          <p:nvPr/>
-        </p:nvSpPr>
-        <p:spPr>
-          <a:xfrm>
-            <a:off x="548640" y="457200"/>
-            <a:ext cx="11064240" cy="777240"/>
-          </a:xfrm>
-          <a:prstGeom prst="rect">
-            <a:avLst/>
-          </a:prstGeom>
-          <a:noFill/>
-        </p:spPr>
-        <p:txBody>
-          <a:bodyPr wrap="square" lIns="18288" rIns="18288" tIns="9144" bIns="9144" anchor="ctr">
-            <a:spAutoFit/>
-          </a:bodyPr>
-          <a:lstStyle/>
-          <a:p>
-            <a:pPr algn="l"/>
-            <a:r>
-              <a:rPr sz="2800" b="1" i="0">
-                <a:solidFill>
-                  <a:srgbClr val="0F2B4C"/>
-                </a:solidFill>
-                <a:latin typeface="Microsoft YaHei"/>
-              </a:rPr>
-              <a:t/>
-            </a:r>
-          </a:p>
-        </p:txBody>
-      </p:sp>
-      <p:sp>
-        <p:nvSpPr>
-          <p:cNvPr id="6" name="Rectangle 5"/>
+          <p:cNvPr id="3" name="Rectangle 2"/>
           <p:cNvSpPr/>
           <p:nvPr/>
         </p:nvSpPr>
         <p:spPr>
           <a:xfrm>
-            <a:off x="566928" y="1298448"/>
-            <a:ext cx="1234440" cy="82296"/>
+            <a:off x="594360" y="6263640"/>
+            <a:ext cx="10972800" cy="13716"/>
           </a:xfrm>
           <a:prstGeom prst="rect">
             <a:avLst/>
@@ -3524,14 +3419,163 @@
       </p:sp>
       <p:sp>
         <p:nvSpPr>
-          <p:cNvPr id="7" name="TextBox 6"/>
+          <p:cNvPr id="4" name="TextBox 3"/>
+          <p:cNvSpPr txBox="1"/>
+          <p:nvPr/>
+        </p:nvSpPr>
+        <p:spPr>
+          <a:xfrm>
+            <a:off x="457200" y="6419088"/>
+            <a:ext cx="3657600" cy="274320"/>
+          </a:xfrm>
+          <a:prstGeom prst="rect">
+            <a:avLst/>
+          </a:prstGeom>
+          <a:noFill/>
+        </p:spPr>
+        <p:txBody>
+          <a:bodyPr wrap="none">
+            <a:spAutoFit/>
+          </a:bodyPr>
+          <a:lstStyle/>
+          <a:p>
+            <a:pPr algn="l"/>
+            <a:r>
+              <a:rPr sz="900" b="0">
+                <a:solidFill>
+                  <a:srgbClr val="6A7280"/>
+                </a:solidFill>
+                <a:latin typeface="Microsoft YaHei"/>
+              </a:rPr>
+              <a:t>LESSONFORGE 微课</a:t>
+            </a:r>
+          </a:p>
+        </p:txBody>
+      </p:sp>
+      <p:sp>
+        <p:nvSpPr>
+          <p:cNvPr id="5" name="TextBox 4"/>
+          <p:cNvSpPr txBox="1"/>
+          <p:nvPr/>
+        </p:nvSpPr>
+        <p:spPr>
+          <a:xfrm>
+            <a:off x="10607040" y="6419088"/>
+            <a:ext cx="1097280" cy="274320"/>
+          </a:xfrm>
+          <a:prstGeom prst="rect">
+            <a:avLst/>
+          </a:prstGeom>
+          <a:noFill/>
+        </p:spPr>
+        <p:txBody>
+          <a:bodyPr wrap="none">
+            <a:spAutoFit/>
+          </a:bodyPr>
+          <a:lstStyle/>
+          <a:p>
+            <a:pPr algn="r"/>
+            <a:r>
+              <a:rPr sz="1000" b="1">
+                <a:solidFill>
+                  <a:srgbClr val="6A7280"/>
+                </a:solidFill>
+                <a:latin typeface="Microsoft YaHei"/>
+              </a:rPr>
+              <a:t>10</a:t>
+            </a:r>
+          </a:p>
+        </p:txBody>
+      </p:sp>
+      <p:sp>
+        <p:nvSpPr>
+          <p:cNvPr id="6" name="TextBox 5"/>
+          <p:cNvSpPr txBox="1"/>
+          <p:nvPr/>
+        </p:nvSpPr>
+        <p:spPr>
+          <a:xfrm>
+            <a:off x="594360" y="502920"/>
+            <a:ext cx="10789920" cy="731520"/>
+          </a:xfrm>
+          <a:prstGeom prst="rect">
+            <a:avLst/>
+          </a:prstGeom>
+          <a:noFill/>
+        </p:spPr>
+        <p:txBody>
+          <a:bodyPr wrap="square" lIns="18288" rIns="18288" tIns="9144" bIns="9144" anchor="ctr">
+            <a:spAutoFit/>
+          </a:bodyPr>
+          <a:lstStyle/>
+          <a:p>
+            <a:pPr algn="l"/>
+            <a:r>
+              <a:rPr sz="2800" b="1" i="0">
+                <a:solidFill>
+                  <a:srgbClr val="0F2B4C"/>
+                </a:solidFill>
+                <a:latin typeface="Microsoft YaHei"/>
+              </a:rPr>
+              <a:t/>
+            </a:r>
+          </a:p>
+        </p:txBody>
+      </p:sp>
+      <p:sp>
+        <p:nvSpPr>
+          <p:cNvPr id="7" name="Rectangle 6"/>
+          <p:cNvSpPr/>
+          <p:nvPr/>
+        </p:nvSpPr>
+        <p:spPr>
+          <a:xfrm>
+            <a:off x="621792" y="1298448"/>
+            <a:ext cx="1234440" cy="82296"/>
+          </a:xfrm>
+          <a:prstGeom prst="rect">
+            <a:avLst/>
+          </a:prstGeom>
+          <a:solidFill>
+            <a:srgbClr val="0F2B4C"/>
+          </a:solidFill>
+          <a:ln>
+            <a:noFill/>
+          </a:ln>
+          <a:effectLst/>
+        </p:spPr>
+        <p:style>
+          <a:lnRef idx="1">
+            <a:schemeClr val="accent1"/>
+          </a:lnRef>
+          <a:fillRef idx="3">
+            <a:schemeClr val="accent1"/>
+          </a:fillRef>
+          <a:effectRef idx="2">
+            <a:schemeClr val="accent1"/>
+          </a:effectRef>
+          <a:fontRef idx="minor">
+            <a:schemeClr val="lt1"/>
+          </a:fontRef>
+        </p:style>
+        <p:txBody>
+          <a:bodyPr rtlCol="0" anchor="ctr"/>
+          <a:lstStyle/>
+          <a:p>
+            <a:pPr algn="ctr"/>
+          </a:p>
+        </p:txBody>
+      </p:sp>
+      <p:sp>
+        <p:nvSpPr>
+          <p:cNvPr id="8" name="TextBox 7"/>
           <p:cNvSpPr txBox="1"/>
           <p:nvPr/>
         </p:nvSpPr>
         <p:spPr>
           <a:xfrm>
             <a:off x="594360" y="1691640"/>
-            <a:ext cx="2606040" cy="1051560"/>
+            <a:ext cx="2606040" cy="1005840"/>
           </a:xfrm>
           <a:prstGeom prst="rect">
             <a:avLst/>
@@ -3559,14 +3603,14 @@
       </p:sp>
       <p:sp>
         <p:nvSpPr>
-          <p:cNvPr id="8" name="TextBox 7"/>
-          <p:cNvSpPr txBox="1"/>
-          <p:nvPr/>
-        </p:nvSpPr>
-        <p:spPr>
-          <a:xfrm>
-            <a:off x="3429000" y="1691640"/>
-            <a:ext cx="2606040" cy="1051560"/>
+          <p:cNvPr id="9" name="TextBox 8"/>
+          <p:cNvSpPr txBox="1"/>
+          <p:nvPr/>
+        </p:nvSpPr>
+        <p:spPr>
+          <a:xfrm>
+            <a:off x="6035040" y="1691640"/>
+            <a:ext cx="2606040" cy="1005840"/>
           </a:xfrm>
           <a:prstGeom prst="rect">
             <a:avLst/>
@@ -3594,14 +3638,14 @@
       </p:sp>
       <p:sp>
         <p:nvSpPr>
-          <p:cNvPr id="9" name="TextBox 8"/>
-          <p:cNvSpPr txBox="1"/>
-          <p:nvPr/>
-        </p:nvSpPr>
-        <p:spPr>
-          <a:xfrm>
-            <a:off x="6263640" y="1691640"/>
-            <a:ext cx="2606040" cy="1051560"/>
+          <p:cNvPr id="10" name="TextBox 9"/>
+          <p:cNvSpPr txBox="1"/>
+          <p:nvPr/>
+        </p:nvSpPr>
+        <p:spPr>
+          <a:xfrm>
+            <a:off x="11475720" y="1691640"/>
+            <a:ext cx="2606040" cy="1005840"/>
           </a:xfrm>
           <a:prstGeom prst="rect">
             <a:avLst/>
@@ -3629,14 +3673,14 @@
       </p:sp>
       <p:sp>
         <p:nvSpPr>
-          <p:cNvPr id="10" name="TextBox 9"/>
-          <p:cNvSpPr txBox="1"/>
-          <p:nvPr/>
-        </p:nvSpPr>
-        <p:spPr>
-          <a:xfrm>
-            <a:off x="9098280" y="1691640"/>
-            <a:ext cx="2606040" cy="1051560"/>
+          <p:cNvPr id="11" name="TextBox 10"/>
+          <p:cNvSpPr txBox="1"/>
+          <p:nvPr/>
+        </p:nvSpPr>
+        <p:spPr>
+          <a:xfrm>
+            <a:off x="16916400" y="1691640"/>
+            <a:ext cx="2606040" cy="1005840"/>
           </a:xfrm>
           <a:prstGeom prst="rect">
             <a:avLst/>
@@ -3664,13 +3708,13 @@
       </p:sp>
       <p:sp>
         <p:nvSpPr>
-          <p:cNvPr id="11" name="TextBox 10"/>
-          <p:cNvSpPr txBox="1"/>
-          <p:nvPr/>
-        </p:nvSpPr>
-        <p:spPr>
-          <a:xfrm>
-            <a:off x="594360" y="3108960"/>
+          <p:cNvPr id="12" name="TextBox 11"/>
+          <p:cNvSpPr txBox="1"/>
+          <p:nvPr/>
+        </p:nvSpPr>
+        <p:spPr>
+          <a:xfrm>
+            <a:off x="594360" y="3063240"/>
             <a:ext cx="2743200" cy="457200"/>
           </a:xfrm>
           <a:prstGeom prst="rect">
@@ -3699,13 +3743,13 @@
       </p:sp>
       <p:sp>
         <p:nvSpPr>
-          <p:cNvPr id="12" name="TextBox 11"/>
-          <p:cNvSpPr txBox="1"/>
-          <p:nvPr/>
-        </p:nvSpPr>
-        <p:spPr>
-          <a:xfrm>
-            <a:off x="594360" y="3657600"/>
+          <p:cNvPr id="13" name="TextBox 12"/>
+          <p:cNvSpPr txBox="1"/>
+          <p:nvPr/>
+        </p:nvSpPr>
+        <p:spPr>
+          <a:xfrm>
+            <a:off x="594360" y="3611880"/>
             <a:ext cx="10972800" cy="1097280"/>
           </a:xfrm>
           <a:prstGeom prst="rect">
@@ -3767,7 +3811,7 @@
         <p:spPr>
           <a:xfrm>
             <a:off x="0" y="0"/>
-            <a:ext cx="118872" cy="6858000"/>
+            <a:ext cx="12191695" cy="91440"/>
           </a:xfrm>
           <a:prstGeom prst="rect">
             <a:avLst/>
@@ -3804,119 +3848,14 @@
       </p:sp>
       <p:sp>
         <p:nvSpPr>
-          <p:cNvPr id="3" name="TextBox 2"/>
-          <p:cNvSpPr txBox="1"/>
-          <p:nvPr/>
-        </p:nvSpPr>
-        <p:spPr>
-          <a:xfrm>
-            <a:off x="457200" y="6419088"/>
-            <a:ext cx="3657600" cy="274320"/>
-          </a:xfrm>
-          <a:prstGeom prst="rect">
-            <a:avLst/>
-          </a:prstGeom>
-          <a:noFill/>
-        </p:spPr>
-        <p:txBody>
-          <a:bodyPr wrap="none">
-            <a:spAutoFit/>
-          </a:bodyPr>
-          <a:lstStyle/>
-          <a:p>
-            <a:pPr algn="l"/>
-            <a:r>
-              <a:rPr sz="900" b="0">
-                <a:solidFill>
-                  <a:srgbClr val="6A7280"/>
-                </a:solidFill>
-                <a:latin typeface="Microsoft YaHei"/>
-              </a:rPr>
-              <a:t>LESSONFORGE 微课</a:t>
-            </a:r>
-          </a:p>
-        </p:txBody>
-      </p:sp>
-      <p:sp>
-        <p:nvSpPr>
-          <p:cNvPr id="4" name="TextBox 3"/>
-          <p:cNvSpPr txBox="1"/>
-          <p:nvPr/>
-        </p:nvSpPr>
-        <p:spPr>
-          <a:xfrm>
-            <a:off x="10607040" y="6419088"/>
-            <a:ext cx="1097280" cy="274320"/>
-          </a:xfrm>
-          <a:prstGeom prst="rect">
-            <a:avLst/>
-          </a:prstGeom>
-          <a:noFill/>
-        </p:spPr>
-        <p:txBody>
-          <a:bodyPr wrap="none">
-            <a:spAutoFit/>
-          </a:bodyPr>
-          <a:lstStyle/>
-          <a:p>
-            <a:pPr algn="r"/>
-            <a:r>
-              <a:rPr sz="1000" b="1">
-                <a:solidFill>
-                  <a:srgbClr val="6A7280"/>
-                </a:solidFill>
-                <a:latin typeface="Microsoft YaHei"/>
-              </a:rPr>
-              <a:t>11</a:t>
-            </a:r>
-          </a:p>
-        </p:txBody>
-      </p:sp>
-      <p:sp>
-        <p:nvSpPr>
-          <p:cNvPr id="5" name="TextBox 4"/>
-          <p:cNvSpPr txBox="1"/>
-          <p:nvPr/>
-        </p:nvSpPr>
-        <p:spPr>
-          <a:xfrm>
-            <a:off x="548640" y="457200"/>
-            <a:ext cx="11064240" cy="777240"/>
-          </a:xfrm>
-          <a:prstGeom prst="rect">
-            <a:avLst/>
-          </a:prstGeom>
-          <a:noFill/>
-        </p:spPr>
-        <p:txBody>
-          <a:bodyPr wrap="square" lIns="18288" rIns="18288" tIns="9144" bIns="9144" anchor="ctr">
-            <a:spAutoFit/>
-          </a:bodyPr>
-          <a:lstStyle/>
-          <a:p>
-            <a:pPr algn="l"/>
-            <a:r>
-              <a:rPr sz="2800" b="1" i="0">
-                <a:solidFill>
-                  <a:srgbClr val="0F2B4C"/>
-                </a:solidFill>
-                <a:latin typeface="Microsoft YaHei"/>
-              </a:rPr>
-              <a:t/>
-            </a:r>
-          </a:p>
-        </p:txBody>
-      </p:sp>
-      <p:sp>
-        <p:nvSpPr>
-          <p:cNvPr id="6" name="Rectangle 5"/>
+          <p:cNvPr id="3" name="Rectangle 2"/>
           <p:cNvSpPr/>
           <p:nvPr/>
         </p:nvSpPr>
         <p:spPr>
           <a:xfrm>
-            <a:off x="566928" y="1298448"/>
-            <a:ext cx="1234440" cy="82296"/>
+            <a:off x="594360" y="6263640"/>
+            <a:ext cx="10972800" cy="13716"/>
           </a:xfrm>
           <a:prstGeom prst="rect">
             <a:avLst/>
@@ -3953,14 +3892,163 @@
       </p:sp>
       <p:sp>
         <p:nvSpPr>
-          <p:cNvPr id="7" name="TextBox 6"/>
+          <p:cNvPr id="4" name="TextBox 3"/>
+          <p:cNvSpPr txBox="1"/>
+          <p:nvPr/>
+        </p:nvSpPr>
+        <p:spPr>
+          <a:xfrm>
+            <a:off x="457200" y="6419088"/>
+            <a:ext cx="3657600" cy="274320"/>
+          </a:xfrm>
+          <a:prstGeom prst="rect">
+            <a:avLst/>
+          </a:prstGeom>
+          <a:noFill/>
+        </p:spPr>
+        <p:txBody>
+          <a:bodyPr wrap="none">
+            <a:spAutoFit/>
+          </a:bodyPr>
+          <a:lstStyle/>
+          <a:p>
+            <a:pPr algn="l"/>
+            <a:r>
+              <a:rPr sz="900" b="0">
+                <a:solidFill>
+                  <a:srgbClr val="6A7280"/>
+                </a:solidFill>
+                <a:latin typeface="Microsoft YaHei"/>
+              </a:rPr>
+              <a:t>LESSONFORGE 微课</a:t>
+            </a:r>
+          </a:p>
+        </p:txBody>
+      </p:sp>
+      <p:sp>
+        <p:nvSpPr>
+          <p:cNvPr id="5" name="TextBox 4"/>
+          <p:cNvSpPr txBox="1"/>
+          <p:nvPr/>
+        </p:nvSpPr>
+        <p:spPr>
+          <a:xfrm>
+            <a:off x="10607040" y="6419088"/>
+            <a:ext cx="1097280" cy="274320"/>
+          </a:xfrm>
+          <a:prstGeom prst="rect">
+            <a:avLst/>
+          </a:prstGeom>
+          <a:noFill/>
+        </p:spPr>
+        <p:txBody>
+          <a:bodyPr wrap="none">
+            <a:spAutoFit/>
+          </a:bodyPr>
+          <a:lstStyle/>
+          <a:p>
+            <a:pPr algn="r"/>
+            <a:r>
+              <a:rPr sz="1000" b="1">
+                <a:solidFill>
+                  <a:srgbClr val="6A7280"/>
+                </a:solidFill>
+                <a:latin typeface="Microsoft YaHei"/>
+              </a:rPr>
+              <a:t>11</a:t>
+            </a:r>
+          </a:p>
+        </p:txBody>
+      </p:sp>
+      <p:sp>
+        <p:nvSpPr>
+          <p:cNvPr id="6" name="TextBox 5"/>
+          <p:cNvSpPr txBox="1"/>
+          <p:nvPr/>
+        </p:nvSpPr>
+        <p:spPr>
+          <a:xfrm>
+            <a:off x="594360" y="502920"/>
+            <a:ext cx="10789920" cy="731520"/>
+          </a:xfrm>
+          <a:prstGeom prst="rect">
+            <a:avLst/>
+          </a:prstGeom>
+          <a:noFill/>
+        </p:spPr>
+        <p:txBody>
+          <a:bodyPr wrap="square" lIns="18288" rIns="18288" tIns="9144" bIns="9144" anchor="ctr">
+            <a:spAutoFit/>
+          </a:bodyPr>
+          <a:lstStyle/>
+          <a:p>
+            <a:pPr algn="l"/>
+            <a:r>
+              <a:rPr sz="2800" b="1" i="0">
+                <a:solidFill>
+                  <a:srgbClr val="0F2B4C"/>
+                </a:solidFill>
+                <a:latin typeface="Microsoft YaHei"/>
+              </a:rPr>
+              <a:t/>
+            </a:r>
+          </a:p>
+        </p:txBody>
+      </p:sp>
+      <p:sp>
+        <p:nvSpPr>
+          <p:cNvPr id="7" name="Rectangle 6"/>
+          <p:cNvSpPr/>
+          <p:nvPr/>
+        </p:nvSpPr>
+        <p:spPr>
+          <a:xfrm>
+            <a:off x="621792" y="1298448"/>
+            <a:ext cx="1234440" cy="82296"/>
+          </a:xfrm>
+          <a:prstGeom prst="rect">
+            <a:avLst/>
+          </a:prstGeom>
+          <a:solidFill>
+            <a:srgbClr val="0F2B4C"/>
+          </a:solidFill>
+          <a:ln>
+            <a:noFill/>
+          </a:ln>
+          <a:effectLst/>
+        </p:spPr>
+        <p:style>
+          <a:lnRef idx="1">
+            <a:schemeClr val="accent1"/>
+          </a:lnRef>
+          <a:fillRef idx="3">
+            <a:schemeClr val="accent1"/>
+          </a:fillRef>
+          <a:effectRef idx="2">
+            <a:schemeClr val="accent1"/>
+          </a:effectRef>
+          <a:fontRef idx="minor">
+            <a:schemeClr val="lt1"/>
+          </a:fontRef>
+        </p:style>
+        <p:txBody>
+          <a:bodyPr rtlCol="0" anchor="ctr"/>
+          <a:lstStyle/>
+          <a:p>
+            <a:pPr algn="ctr"/>
+          </a:p>
+        </p:txBody>
+      </p:sp>
+      <p:sp>
+        <p:nvSpPr>
+          <p:cNvPr id="8" name="TextBox 7"/>
           <p:cNvSpPr txBox="1"/>
           <p:nvPr/>
         </p:nvSpPr>
         <p:spPr>
           <a:xfrm>
             <a:off x="594360" y="1783080"/>
-            <a:ext cx="10972800" cy="822960"/>
+            <a:ext cx="10972800" cy="777240"/>
           </a:xfrm>
           <a:prstGeom prst="rect">
             <a:avLst/>
@@ -3988,14 +4076,14 @@
       </p:sp>
       <p:sp>
         <p:nvSpPr>
-          <p:cNvPr id="8" name="TextBox 7"/>
-          <p:cNvSpPr txBox="1"/>
-          <p:nvPr/>
-        </p:nvSpPr>
-        <p:spPr>
-          <a:xfrm>
-            <a:off x="594360" y="2880360"/>
-            <a:ext cx="10972800" cy="777240"/>
+          <p:cNvPr id="9" name="TextBox 8"/>
+          <p:cNvSpPr txBox="1"/>
+          <p:nvPr/>
+        </p:nvSpPr>
+        <p:spPr>
+          <a:xfrm>
+            <a:off x="594360" y="2834640"/>
+            <a:ext cx="5394960" cy="822960"/>
           </a:xfrm>
           <a:prstGeom prst="rect">
             <a:avLst/>
@@ -4023,14 +4111,14 @@
       </p:sp>
       <p:sp>
         <p:nvSpPr>
-          <p:cNvPr id="9" name="TextBox 8"/>
-          <p:cNvSpPr txBox="1"/>
-          <p:nvPr/>
-        </p:nvSpPr>
-        <p:spPr>
-          <a:xfrm>
-            <a:off x="594360" y="3840480"/>
-            <a:ext cx="10972800" cy="777240"/>
+          <p:cNvPr id="10" name="TextBox 9"/>
+          <p:cNvSpPr txBox="1"/>
+          <p:nvPr/>
+        </p:nvSpPr>
+        <p:spPr>
+          <a:xfrm>
+            <a:off x="6263640" y="2834640"/>
+            <a:ext cx="5394960" cy="822960"/>
           </a:xfrm>
           <a:prstGeom prst="rect">
             <a:avLst/>
@@ -4058,14 +4146,49 @@
       </p:sp>
       <p:sp>
         <p:nvSpPr>
-          <p:cNvPr id="10" name="TextBox 9"/>
-          <p:cNvSpPr txBox="1"/>
-          <p:nvPr/>
-        </p:nvSpPr>
-        <p:spPr>
-          <a:xfrm>
-            <a:off x="594360" y="4800600"/>
-            <a:ext cx="10972800" cy="777240"/>
+          <p:cNvPr id="11" name="TextBox 10"/>
+          <p:cNvSpPr txBox="1"/>
+          <p:nvPr/>
+        </p:nvSpPr>
+        <p:spPr>
+          <a:xfrm>
+            <a:off x="594360" y="4206240"/>
+            <a:ext cx="5394960" cy="822960"/>
+          </a:xfrm>
+          <a:prstGeom prst="rect">
+            <a:avLst/>
+          </a:prstGeom>
+          <a:noFill/>
+        </p:spPr>
+        <p:txBody>
+          <a:bodyPr wrap="square" lIns="18288" rIns="18288" tIns="9144" bIns="9144" anchor="ctr">
+            <a:spAutoFit/>
+          </a:bodyPr>
+          <a:lstStyle/>
+          <a:p>
+            <a:pPr algn="l"/>
+            <a:r>
+              <a:rPr sz="1600" b="0" i="0">
+                <a:solidFill>
+                  <a:srgbClr val="14181F"/>
+                </a:solidFill>
+                <a:latin typeface="Microsoft YaHei"/>
+              </a:rPr>
+              <a:t/>
+            </a:r>
+          </a:p>
+        </p:txBody>
+      </p:sp>
+      <p:sp>
+        <p:nvSpPr>
+          <p:cNvPr id="12" name="TextBox 11"/>
+          <p:cNvSpPr txBox="1"/>
+          <p:nvPr/>
+        </p:nvSpPr>
+        <p:spPr>
+          <a:xfrm>
+            <a:off x="6263640" y="4206240"/>
+            <a:ext cx="5394960" cy="822960"/>
           </a:xfrm>
           <a:prstGeom prst="rect">
             <a:avLst/>
@@ -4126,7 +4249,7 @@
         <p:spPr>
           <a:xfrm>
             <a:off x="0" y="0"/>
-            <a:ext cx="118872" cy="6858000"/>
+            <a:ext cx="12191695" cy="91440"/>
           </a:xfrm>
           <a:prstGeom prst="rect">
             <a:avLst/>
@@ -4163,119 +4286,14 @@
       </p:sp>
       <p:sp>
         <p:nvSpPr>
-          <p:cNvPr id="3" name="TextBox 2"/>
-          <p:cNvSpPr txBox="1"/>
-          <p:nvPr/>
-        </p:nvSpPr>
-        <p:spPr>
-          <a:xfrm>
-            <a:off x="457200" y="6419088"/>
-            <a:ext cx="3657600" cy="274320"/>
-          </a:xfrm>
-          <a:prstGeom prst="rect">
-            <a:avLst/>
-          </a:prstGeom>
-          <a:noFill/>
-        </p:spPr>
-        <p:txBody>
-          <a:bodyPr wrap="none">
-            <a:spAutoFit/>
-          </a:bodyPr>
-          <a:lstStyle/>
-          <a:p>
-            <a:pPr algn="l"/>
-            <a:r>
-              <a:rPr sz="900" b="0">
-                <a:solidFill>
-                  <a:srgbClr val="6A7280"/>
-                </a:solidFill>
-                <a:latin typeface="Microsoft YaHei"/>
-              </a:rPr>
-              <a:t>LESSONFORGE 微课</a:t>
-            </a:r>
-          </a:p>
-        </p:txBody>
-      </p:sp>
-      <p:sp>
-        <p:nvSpPr>
-          <p:cNvPr id="4" name="TextBox 3"/>
-          <p:cNvSpPr txBox="1"/>
-          <p:nvPr/>
-        </p:nvSpPr>
-        <p:spPr>
-          <a:xfrm>
-            <a:off x="10607040" y="6419088"/>
-            <a:ext cx="1097280" cy="274320"/>
-          </a:xfrm>
-          <a:prstGeom prst="rect">
-            <a:avLst/>
-          </a:prstGeom>
-          <a:noFill/>
-        </p:spPr>
-        <p:txBody>
-          <a:bodyPr wrap="none">
-            <a:spAutoFit/>
-          </a:bodyPr>
-          <a:lstStyle/>
-          <a:p>
-            <a:pPr algn="r"/>
-            <a:r>
-              <a:rPr sz="1000" b="1">
-                <a:solidFill>
-                  <a:srgbClr val="6A7280"/>
-                </a:solidFill>
-                <a:latin typeface="Microsoft YaHei"/>
-              </a:rPr>
-              <a:t>12</a:t>
-            </a:r>
-          </a:p>
-        </p:txBody>
-      </p:sp>
-      <p:sp>
-        <p:nvSpPr>
-          <p:cNvPr id="5" name="TextBox 4"/>
-          <p:cNvSpPr txBox="1"/>
-          <p:nvPr/>
-        </p:nvSpPr>
-        <p:spPr>
-          <a:xfrm>
-            <a:off x="548640" y="457200"/>
-            <a:ext cx="11064240" cy="777240"/>
-          </a:xfrm>
-          <a:prstGeom prst="rect">
-            <a:avLst/>
-          </a:prstGeom>
-          <a:noFill/>
-        </p:spPr>
-        <p:txBody>
-          <a:bodyPr wrap="square" lIns="18288" rIns="18288" tIns="9144" bIns="9144" anchor="ctr">
-            <a:spAutoFit/>
-          </a:bodyPr>
-          <a:lstStyle/>
-          <a:p>
-            <a:pPr algn="l"/>
-            <a:r>
-              <a:rPr sz="2800" b="1" i="0">
-                <a:solidFill>
-                  <a:srgbClr val="0F2B4C"/>
-                </a:solidFill>
-                <a:latin typeface="Microsoft YaHei"/>
-              </a:rPr>
-              <a:t/>
-            </a:r>
-          </a:p>
-        </p:txBody>
-      </p:sp>
-      <p:sp>
-        <p:nvSpPr>
-          <p:cNvPr id="6" name="Rectangle 5"/>
+          <p:cNvPr id="3" name="Rectangle 2"/>
           <p:cNvSpPr/>
           <p:nvPr/>
         </p:nvSpPr>
         <p:spPr>
           <a:xfrm>
-            <a:off x="566928" y="1298448"/>
-            <a:ext cx="1234440" cy="82296"/>
+            <a:off x="594360" y="6263640"/>
+            <a:ext cx="10972800" cy="13716"/>
           </a:xfrm>
           <a:prstGeom prst="rect">
             <a:avLst/>
@@ -4312,7 +4330,156 @@
       </p:sp>
       <p:sp>
         <p:nvSpPr>
-          <p:cNvPr id="7" name="TextBox 6"/>
+          <p:cNvPr id="4" name="TextBox 3"/>
+          <p:cNvSpPr txBox="1"/>
+          <p:nvPr/>
+        </p:nvSpPr>
+        <p:spPr>
+          <a:xfrm>
+            <a:off x="457200" y="6419088"/>
+            <a:ext cx="3657600" cy="274320"/>
+          </a:xfrm>
+          <a:prstGeom prst="rect">
+            <a:avLst/>
+          </a:prstGeom>
+          <a:noFill/>
+        </p:spPr>
+        <p:txBody>
+          <a:bodyPr wrap="none">
+            <a:spAutoFit/>
+          </a:bodyPr>
+          <a:lstStyle/>
+          <a:p>
+            <a:pPr algn="l"/>
+            <a:r>
+              <a:rPr sz="900" b="0">
+                <a:solidFill>
+                  <a:srgbClr val="6A7280"/>
+                </a:solidFill>
+                <a:latin typeface="Microsoft YaHei"/>
+              </a:rPr>
+              <a:t>LESSONFORGE 微课</a:t>
+            </a:r>
+          </a:p>
+        </p:txBody>
+      </p:sp>
+      <p:sp>
+        <p:nvSpPr>
+          <p:cNvPr id="5" name="TextBox 4"/>
+          <p:cNvSpPr txBox="1"/>
+          <p:nvPr/>
+        </p:nvSpPr>
+        <p:spPr>
+          <a:xfrm>
+            <a:off x="10607040" y="6419088"/>
+            <a:ext cx="1097280" cy="274320"/>
+          </a:xfrm>
+          <a:prstGeom prst="rect">
+            <a:avLst/>
+          </a:prstGeom>
+          <a:noFill/>
+        </p:spPr>
+        <p:txBody>
+          <a:bodyPr wrap="none">
+            <a:spAutoFit/>
+          </a:bodyPr>
+          <a:lstStyle/>
+          <a:p>
+            <a:pPr algn="r"/>
+            <a:r>
+              <a:rPr sz="1000" b="1">
+                <a:solidFill>
+                  <a:srgbClr val="6A7280"/>
+                </a:solidFill>
+                <a:latin typeface="Microsoft YaHei"/>
+              </a:rPr>
+              <a:t>12</a:t>
+            </a:r>
+          </a:p>
+        </p:txBody>
+      </p:sp>
+      <p:sp>
+        <p:nvSpPr>
+          <p:cNvPr id="6" name="TextBox 5"/>
+          <p:cNvSpPr txBox="1"/>
+          <p:nvPr/>
+        </p:nvSpPr>
+        <p:spPr>
+          <a:xfrm>
+            <a:off x="594360" y="502920"/>
+            <a:ext cx="10789920" cy="731520"/>
+          </a:xfrm>
+          <a:prstGeom prst="rect">
+            <a:avLst/>
+          </a:prstGeom>
+          <a:noFill/>
+        </p:spPr>
+        <p:txBody>
+          <a:bodyPr wrap="square" lIns="18288" rIns="18288" tIns="9144" bIns="9144" anchor="ctr">
+            <a:spAutoFit/>
+          </a:bodyPr>
+          <a:lstStyle/>
+          <a:p>
+            <a:pPr algn="l"/>
+            <a:r>
+              <a:rPr sz="2800" b="1" i="0">
+                <a:solidFill>
+                  <a:srgbClr val="0F2B4C"/>
+                </a:solidFill>
+                <a:latin typeface="Microsoft YaHei"/>
+              </a:rPr>
+              <a:t/>
+            </a:r>
+          </a:p>
+        </p:txBody>
+      </p:sp>
+      <p:sp>
+        <p:nvSpPr>
+          <p:cNvPr id="7" name="Rectangle 6"/>
+          <p:cNvSpPr/>
+          <p:nvPr/>
+        </p:nvSpPr>
+        <p:spPr>
+          <a:xfrm>
+            <a:off x="621792" y="1298448"/>
+            <a:ext cx="1234440" cy="82296"/>
+          </a:xfrm>
+          <a:prstGeom prst="rect">
+            <a:avLst/>
+          </a:prstGeom>
+          <a:solidFill>
+            <a:srgbClr val="0F2B4C"/>
+          </a:solidFill>
+          <a:ln>
+            <a:noFill/>
+          </a:ln>
+          <a:effectLst/>
+        </p:spPr>
+        <p:style>
+          <a:lnRef idx="1">
+            <a:schemeClr val="accent1"/>
+          </a:lnRef>
+          <a:fillRef idx="3">
+            <a:schemeClr val="accent1"/>
+          </a:fillRef>
+          <a:effectRef idx="2">
+            <a:schemeClr val="accent1"/>
+          </a:effectRef>
+          <a:fontRef idx="minor">
+            <a:schemeClr val="lt1"/>
+          </a:fontRef>
+        </p:style>
+        <p:txBody>
+          <a:bodyPr rtlCol="0" anchor="ctr"/>
+          <a:lstStyle/>
+          <a:p>
+            <a:pPr algn="ctr"/>
+          </a:p>
+        </p:txBody>
+      </p:sp>
+      <p:sp>
+        <p:nvSpPr>
+          <p:cNvPr id="8" name="TextBox 7"/>
           <p:cNvSpPr txBox="1"/>
           <p:nvPr/>
         </p:nvSpPr>
@@ -4347,14 +4514,14 @@
       </p:sp>
       <p:sp>
         <p:nvSpPr>
-          <p:cNvPr id="8" name="TextBox 7"/>
-          <p:cNvSpPr txBox="1"/>
-          <p:nvPr/>
-        </p:nvSpPr>
-        <p:spPr>
-          <a:xfrm>
-            <a:off x="594360" y="2331720"/>
-            <a:ext cx="5394960" cy="548640"/>
+          <p:cNvPr id="9" name="TextBox 8"/>
+          <p:cNvSpPr txBox="1"/>
+          <p:nvPr/>
+        </p:nvSpPr>
+        <p:spPr>
+          <a:xfrm>
+            <a:off x="594360" y="2377440"/>
+            <a:ext cx="5394960" cy="868680"/>
           </a:xfrm>
           <a:prstGeom prst="rect">
             <a:avLst/>
@@ -4382,14 +4549,14 @@
       </p:sp>
       <p:sp>
         <p:nvSpPr>
-          <p:cNvPr id="9" name="TextBox 8"/>
-          <p:cNvSpPr txBox="1"/>
-          <p:nvPr/>
-        </p:nvSpPr>
-        <p:spPr>
-          <a:xfrm>
-            <a:off x="6263640" y="2331720"/>
-            <a:ext cx="5394960" cy="548640"/>
+          <p:cNvPr id="10" name="TextBox 9"/>
+          <p:cNvSpPr txBox="1"/>
+          <p:nvPr/>
+        </p:nvSpPr>
+        <p:spPr>
+          <a:xfrm>
+            <a:off x="6263640" y="2377440"/>
+            <a:ext cx="5394960" cy="868680"/>
           </a:xfrm>
           <a:prstGeom prst="rect">
             <a:avLst/>
@@ -4417,14 +4584,14 @@
       </p:sp>
       <p:sp>
         <p:nvSpPr>
-          <p:cNvPr id="10" name="TextBox 9"/>
-          <p:cNvSpPr txBox="1"/>
-          <p:nvPr/>
-        </p:nvSpPr>
-        <p:spPr>
-          <a:xfrm>
-            <a:off x="594360" y="3017520"/>
-            <a:ext cx="5394960" cy="548640"/>
+          <p:cNvPr id="11" name="TextBox 10"/>
+          <p:cNvSpPr txBox="1"/>
+          <p:nvPr/>
+        </p:nvSpPr>
+        <p:spPr>
+          <a:xfrm>
+            <a:off x="594360" y="3703320"/>
+            <a:ext cx="5394960" cy="868680"/>
           </a:xfrm>
           <a:prstGeom prst="rect">
             <a:avLst/>
@@ -4452,14 +4619,14 @@
       </p:sp>
       <p:sp>
         <p:nvSpPr>
-          <p:cNvPr id="11" name="TextBox 10"/>
-          <p:cNvSpPr txBox="1"/>
-          <p:nvPr/>
-        </p:nvSpPr>
-        <p:spPr>
-          <a:xfrm>
-            <a:off x="6263640" y="3017520"/>
-            <a:ext cx="5394960" cy="548640"/>
+          <p:cNvPr id="12" name="TextBox 11"/>
+          <p:cNvSpPr txBox="1"/>
+          <p:nvPr/>
+        </p:nvSpPr>
+        <p:spPr>
+          <a:xfrm>
+            <a:off x="6263640" y="3703320"/>
+            <a:ext cx="5394960" cy="868680"/>
           </a:xfrm>
           <a:prstGeom prst="rect">
             <a:avLst/>
@@ -4487,14 +4654,14 @@
       </p:sp>
       <p:sp>
         <p:nvSpPr>
-          <p:cNvPr id="12" name="TextBox 11"/>
-          <p:cNvSpPr txBox="1"/>
-          <p:nvPr/>
-        </p:nvSpPr>
-        <p:spPr>
-          <a:xfrm>
-            <a:off x="594360" y="3703320"/>
-            <a:ext cx="5394960" cy="548640"/>
+          <p:cNvPr id="13" name="TextBox 12"/>
+          <p:cNvSpPr txBox="1"/>
+          <p:nvPr/>
+        </p:nvSpPr>
+        <p:spPr>
+          <a:xfrm>
+            <a:off x="594360" y="5029200"/>
+            <a:ext cx="5394960" cy="868680"/>
           </a:xfrm>
           <a:prstGeom prst="rect">
             <a:avLst/>
@@ -4522,14 +4689,14 @@
       </p:sp>
       <p:sp>
         <p:nvSpPr>
-          <p:cNvPr id="13" name="TextBox 12"/>
-          <p:cNvSpPr txBox="1"/>
-          <p:nvPr/>
-        </p:nvSpPr>
-        <p:spPr>
-          <a:xfrm>
-            <a:off x="6263640" y="3703320"/>
-            <a:ext cx="5394960" cy="548640"/>
+          <p:cNvPr id="14" name="TextBox 13"/>
+          <p:cNvSpPr txBox="1"/>
+          <p:nvPr/>
+        </p:nvSpPr>
+        <p:spPr>
+          <a:xfrm>
+            <a:off x="6263640" y="5029200"/>
+            <a:ext cx="5394960" cy="868680"/>
           </a:xfrm>
           <a:prstGeom prst="rect">
             <a:avLst/>
@@ -4557,84 +4724,14 @@
       </p:sp>
       <p:sp>
         <p:nvSpPr>
-          <p:cNvPr id="14" name="TextBox 13"/>
-          <p:cNvSpPr txBox="1"/>
-          <p:nvPr/>
-        </p:nvSpPr>
-        <p:spPr>
-          <a:xfrm>
-            <a:off x="594360" y="4389120"/>
-            <a:ext cx="5394960" cy="548640"/>
-          </a:xfrm>
-          <a:prstGeom prst="rect">
-            <a:avLst/>
-          </a:prstGeom>
-          <a:noFill/>
-        </p:spPr>
-        <p:txBody>
-          <a:bodyPr wrap="square" lIns="18288" rIns="18288" tIns="9144" bIns="9144" anchor="ctr">
-            <a:spAutoFit/>
-          </a:bodyPr>
-          <a:lstStyle/>
-          <a:p>
-            <a:pPr algn="l"/>
-            <a:r>
-              <a:rPr sz="1600" b="0" i="0">
-                <a:solidFill>
-                  <a:srgbClr val="14181F"/>
-                </a:solidFill>
-                <a:latin typeface="Microsoft YaHei"/>
-              </a:rPr>
-              <a:t/>
-            </a:r>
-          </a:p>
-        </p:txBody>
-      </p:sp>
-      <p:sp>
-        <p:nvSpPr>
           <p:cNvPr id="15" name="TextBox 14"/>
           <p:cNvSpPr txBox="1"/>
           <p:nvPr/>
         </p:nvSpPr>
         <p:spPr>
           <a:xfrm>
-            <a:off x="6263640" y="4389120"/>
-            <a:ext cx="5394960" cy="548640"/>
-          </a:xfrm>
-          <a:prstGeom prst="rect">
-            <a:avLst/>
-          </a:prstGeom>
-          <a:noFill/>
-        </p:spPr>
-        <p:txBody>
-          <a:bodyPr wrap="square" lIns="18288" rIns="18288" tIns="9144" bIns="9144" anchor="ctr">
-            <a:spAutoFit/>
-          </a:bodyPr>
-          <a:lstStyle/>
-          <a:p>
-            <a:pPr algn="l"/>
-            <a:r>
-              <a:rPr sz="1600" b="0" i="0">
-                <a:solidFill>
-                  <a:srgbClr val="14181F"/>
-                </a:solidFill>
-                <a:latin typeface="Microsoft YaHei"/>
-              </a:rPr>
-              <a:t/>
-            </a:r>
-          </a:p>
-        </p:txBody>
-      </p:sp>
-      <p:sp>
-        <p:nvSpPr>
-          <p:cNvPr id="16" name="TextBox 15"/>
-          <p:cNvSpPr txBox="1"/>
-          <p:nvPr/>
-        </p:nvSpPr>
-        <p:spPr>
-          <a:xfrm>
-            <a:off x="594360" y="5349240"/>
-            <a:ext cx="10972800" cy="685800"/>
+            <a:off x="594360" y="5394960"/>
+            <a:ext cx="10972800" cy="640080"/>
           </a:xfrm>
           <a:prstGeom prst="rect">
             <a:avLst/>
@@ -4695,7 +4792,7 @@
         <p:spPr>
           <a:xfrm>
             <a:off x="0" y="0"/>
-            <a:ext cx="118872" cy="6858000"/>
+            <a:ext cx="12191695" cy="91440"/>
           </a:xfrm>
           <a:prstGeom prst="rect">
             <a:avLst/>
@@ -4732,119 +4829,14 @@
       </p:sp>
       <p:sp>
         <p:nvSpPr>
-          <p:cNvPr id="3" name="TextBox 2"/>
-          <p:cNvSpPr txBox="1"/>
-          <p:nvPr/>
-        </p:nvSpPr>
-        <p:spPr>
-          <a:xfrm>
-            <a:off x="457200" y="6419088"/>
-            <a:ext cx="3657600" cy="274320"/>
-          </a:xfrm>
-          <a:prstGeom prst="rect">
-            <a:avLst/>
-          </a:prstGeom>
-          <a:noFill/>
-        </p:spPr>
-        <p:txBody>
-          <a:bodyPr wrap="none">
-            <a:spAutoFit/>
-          </a:bodyPr>
-          <a:lstStyle/>
-          <a:p>
-            <a:pPr algn="l"/>
-            <a:r>
-              <a:rPr sz="900" b="0">
-                <a:solidFill>
-                  <a:srgbClr val="6A7280"/>
-                </a:solidFill>
-                <a:latin typeface="Microsoft YaHei"/>
-              </a:rPr>
-              <a:t>LESSONFORGE 微课</a:t>
-            </a:r>
-          </a:p>
-        </p:txBody>
-      </p:sp>
-      <p:sp>
-        <p:nvSpPr>
-          <p:cNvPr id="4" name="TextBox 3"/>
-          <p:cNvSpPr txBox="1"/>
-          <p:nvPr/>
-        </p:nvSpPr>
-        <p:spPr>
-          <a:xfrm>
-            <a:off x="10607040" y="6419088"/>
-            <a:ext cx="1097280" cy="274320"/>
-          </a:xfrm>
-          <a:prstGeom prst="rect">
-            <a:avLst/>
-          </a:prstGeom>
-          <a:noFill/>
-        </p:spPr>
-        <p:txBody>
-          <a:bodyPr wrap="none">
-            <a:spAutoFit/>
-          </a:bodyPr>
-          <a:lstStyle/>
-          <a:p>
-            <a:pPr algn="r"/>
-            <a:r>
-              <a:rPr sz="1000" b="1">
-                <a:solidFill>
-                  <a:srgbClr val="6A7280"/>
-                </a:solidFill>
-                <a:latin typeface="Microsoft YaHei"/>
-              </a:rPr>
-              <a:t>13</a:t>
-            </a:r>
-          </a:p>
-        </p:txBody>
-      </p:sp>
-      <p:sp>
-        <p:nvSpPr>
-          <p:cNvPr id="5" name="TextBox 4"/>
-          <p:cNvSpPr txBox="1"/>
-          <p:nvPr/>
-        </p:nvSpPr>
-        <p:spPr>
-          <a:xfrm>
-            <a:off x="548640" y="457200"/>
-            <a:ext cx="11064240" cy="777240"/>
-          </a:xfrm>
-          <a:prstGeom prst="rect">
-            <a:avLst/>
-          </a:prstGeom>
-          <a:noFill/>
-        </p:spPr>
-        <p:txBody>
-          <a:bodyPr wrap="square" lIns="18288" rIns="18288" tIns="9144" bIns="9144" anchor="ctr">
-            <a:spAutoFit/>
-          </a:bodyPr>
-          <a:lstStyle/>
-          <a:p>
-            <a:pPr algn="l"/>
-            <a:r>
-              <a:rPr sz="2800" b="1" i="0">
-                <a:solidFill>
-                  <a:srgbClr val="0F2B4C"/>
-                </a:solidFill>
-                <a:latin typeface="Microsoft YaHei"/>
-              </a:rPr>
-              <a:t/>
-            </a:r>
-          </a:p>
-        </p:txBody>
-      </p:sp>
-      <p:sp>
-        <p:nvSpPr>
-          <p:cNvPr id="6" name="Rectangle 5"/>
+          <p:cNvPr id="3" name="Rectangle 2"/>
           <p:cNvSpPr/>
           <p:nvPr/>
         </p:nvSpPr>
         <p:spPr>
           <a:xfrm>
-            <a:off x="566928" y="1298448"/>
-            <a:ext cx="1234440" cy="82296"/>
+            <a:off x="594360" y="6263640"/>
+            <a:ext cx="10972800" cy="13716"/>
           </a:xfrm>
           <a:prstGeom prst="rect">
             <a:avLst/>
@@ -4881,7 +4873,156 @@
       </p:sp>
       <p:sp>
         <p:nvSpPr>
-          <p:cNvPr id="7" name="TextBox 6"/>
+          <p:cNvPr id="4" name="TextBox 3"/>
+          <p:cNvSpPr txBox="1"/>
+          <p:nvPr/>
+        </p:nvSpPr>
+        <p:spPr>
+          <a:xfrm>
+            <a:off x="457200" y="6419088"/>
+            <a:ext cx="3657600" cy="274320"/>
+          </a:xfrm>
+          <a:prstGeom prst="rect">
+            <a:avLst/>
+          </a:prstGeom>
+          <a:noFill/>
+        </p:spPr>
+        <p:txBody>
+          <a:bodyPr wrap="none">
+            <a:spAutoFit/>
+          </a:bodyPr>
+          <a:lstStyle/>
+          <a:p>
+            <a:pPr algn="l"/>
+            <a:r>
+              <a:rPr sz="900" b="0">
+                <a:solidFill>
+                  <a:srgbClr val="6A7280"/>
+                </a:solidFill>
+                <a:latin typeface="Microsoft YaHei"/>
+              </a:rPr>
+              <a:t>LESSONFORGE 微课</a:t>
+            </a:r>
+          </a:p>
+        </p:txBody>
+      </p:sp>
+      <p:sp>
+        <p:nvSpPr>
+          <p:cNvPr id="5" name="TextBox 4"/>
+          <p:cNvSpPr txBox="1"/>
+          <p:nvPr/>
+        </p:nvSpPr>
+        <p:spPr>
+          <a:xfrm>
+            <a:off x="10607040" y="6419088"/>
+            <a:ext cx="1097280" cy="274320"/>
+          </a:xfrm>
+          <a:prstGeom prst="rect">
+            <a:avLst/>
+          </a:prstGeom>
+          <a:noFill/>
+        </p:spPr>
+        <p:txBody>
+          <a:bodyPr wrap="none">
+            <a:spAutoFit/>
+          </a:bodyPr>
+          <a:lstStyle/>
+          <a:p>
+            <a:pPr algn="r"/>
+            <a:r>
+              <a:rPr sz="1000" b="1">
+                <a:solidFill>
+                  <a:srgbClr val="6A7280"/>
+                </a:solidFill>
+                <a:latin typeface="Microsoft YaHei"/>
+              </a:rPr>
+              <a:t>13</a:t>
+            </a:r>
+          </a:p>
+        </p:txBody>
+      </p:sp>
+      <p:sp>
+        <p:nvSpPr>
+          <p:cNvPr id="6" name="TextBox 5"/>
+          <p:cNvSpPr txBox="1"/>
+          <p:nvPr/>
+        </p:nvSpPr>
+        <p:spPr>
+          <a:xfrm>
+            <a:off x="594360" y="502920"/>
+            <a:ext cx="10789920" cy="731520"/>
+          </a:xfrm>
+          <a:prstGeom prst="rect">
+            <a:avLst/>
+          </a:prstGeom>
+          <a:noFill/>
+        </p:spPr>
+        <p:txBody>
+          <a:bodyPr wrap="square" lIns="18288" rIns="18288" tIns="9144" bIns="9144" anchor="ctr">
+            <a:spAutoFit/>
+          </a:bodyPr>
+          <a:lstStyle/>
+          <a:p>
+            <a:pPr algn="l"/>
+            <a:r>
+              <a:rPr sz="2800" b="1" i="0">
+                <a:solidFill>
+                  <a:srgbClr val="0F2B4C"/>
+                </a:solidFill>
+                <a:latin typeface="Microsoft YaHei"/>
+              </a:rPr>
+              <a:t/>
+            </a:r>
+          </a:p>
+        </p:txBody>
+      </p:sp>
+      <p:sp>
+        <p:nvSpPr>
+          <p:cNvPr id="7" name="Rectangle 6"/>
+          <p:cNvSpPr/>
+          <p:nvPr/>
+        </p:nvSpPr>
+        <p:spPr>
+          <a:xfrm>
+            <a:off x="621792" y="1298448"/>
+            <a:ext cx="1234440" cy="82296"/>
+          </a:xfrm>
+          <a:prstGeom prst="rect">
+            <a:avLst/>
+          </a:prstGeom>
+          <a:solidFill>
+            <a:srgbClr val="0F2B4C"/>
+          </a:solidFill>
+          <a:ln>
+            <a:noFill/>
+          </a:ln>
+          <a:effectLst/>
+        </p:spPr>
+        <p:style>
+          <a:lnRef idx="1">
+            <a:schemeClr val="accent1"/>
+          </a:lnRef>
+          <a:fillRef idx="3">
+            <a:schemeClr val="accent1"/>
+          </a:fillRef>
+          <a:effectRef idx="2">
+            <a:schemeClr val="accent1"/>
+          </a:effectRef>
+          <a:fontRef idx="minor">
+            <a:schemeClr val="lt1"/>
+          </a:fontRef>
+        </p:style>
+        <p:txBody>
+          <a:bodyPr rtlCol="0" anchor="ctr"/>
+          <a:lstStyle/>
+          <a:p>
+            <a:pPr algn="ctr"/>
+          </a:p>
+        </p:txBody>
+      </p:sp>
+      <p:sp>
+        <p:nvSpPr>
+          <p:cNvPr id="8" name="TextBox 7"/>
           <p:cNvSpPr txBox="1"/>
           <p:nvPr/>
         </p:nvSpPr>
@@ -4916,7 +5057,7 @@
       </p:sp>
       <p:sp>
         <p:nvSpPr>
-          <p:cNvPr id="8" name="TextBox 7"/>
+          <p:cNvPr id="9" name="TextBox 8"/>
           <p:cNvSpPr txBox="1"/>
           <p:nvPr/>
         </p:nvSpPr>
@@ -4951,7 +5092,7 @@
       </p:sp>
       <p:sp>
         <p:nvSpPr>
-          <p:cNvPr id="9" name="TextBox 8"/>
+          <p:cNvPr id="10" name="TextBox 9"/>
           <p:cNvSpPr txBox="1"/>
           <p:nvPr/>
         </p:nvSpPr>
@@ -4986,7 +5127,7 @@
       </p:sp>
       <p:sp>
         <p:nvSpPr>
-          <p:cNvPr id="10" name="TextBox 9"/>
+          <p:cNvPr id="11" name="TextBox 10"/>
           <p:cNvSpPr txBox="1"/>
           <p:nvPr/>
         </p:nvSpPr>
@@ -5021,7 +5162,7 @@
       </p:sp>
       <p:sp>
         <p:nvSpPr>
-          <p:cNvPr id="11" name="TextBox 10"/>
+          <p:cNvPr id="12" name="TextBox 11"/>
           <p:cNvSpPr txBox="1"/>
           <p:nvPr/>
         </p:nvSpPr>
@@ -5056,7 +5197,7 @@
       </p:sp>
       <p:sp>
         <p:nvSpPr>
-          <p:cNvPr id="12" name="TextBox 11"/>
+          <p:cNvPr id="13" name="TextBox 12"/>
           <p:cNvSpPr txBox="1"/>
           <p:nvPr/>
         </p:nvSpPr>
@@ -5091,7 +5232,7 @@
       </p:sp>
       <p:sp>
         <p:nvSpPr>
-          <p:cNvPr id="13" name="TextBox 12"/>
+          <p:cNvPr id="14" name="TextBox 13"/>
           <p:cNvSpPr txBox="1"/>
           <p:nvPr/>
         </p:nvSpPr>
@@ -5159,7 +5300,7 @@
         <p:spPr>
           <a:xfrm>
             <a:off x="0" y="0"/>
-            <a:ext cx="118872" cy="6858000"/>
+            <a:ext cx="12191695" cy="91440"/>
           </a:xfrm>
           <a:prstGeom prst="rect">
             <a:avLst/>
@@ -5196,119 +5337,14 @@
       </p:sp>
       <p:sp>
         <p:nvSpPr>
-          <p:cNvPr id="3" name="TextBox 2"/>
-          <p:cNvSpPr txBox="1"/>
-          <p:nvPr/>
-        </p:nvSpPr>
-        <p:spPr>
-          <a:xfrm>
-            <a:off x="457200" y="6419088"/>
-            <a:ext cx="3657600" cy="274320"/>
-          </a:xfrm>
-          <a:prstGeom prst="rect">
-            <a:avLst/>
-          </a:prstGeom>
-          <a:noFill/>
-        </p:spPr>
-        <p:txBody>
-          <a:bodyPr wrap="none">
-            <a:spAutoFit/>
-          </a:bodyPr>
-          <a:lstStyle/>
-          <a:p>
-            <a:pPr algn="l"/>
-            <a:r>
-              <a:rPr sz="900" b="0">
-                <a:solidFill>
-                  <a:srgbClr val="6A7280"/>
-                </a:solidFill>
-                <a:latin typeface="Microsoft YaHei"/>
-              </a:rPr>
-              <a:t>LESSONFORGE 微课</a:t>
-            </a:r>
-          </a:p>
-        </p:txBody>
-      </p:sp>
-      <p:sp>
-        <p:nvSpPr>
-          <p:cNvPr id="4" name="TextBox 3"/>
-          <p:cNvSpPr txBox="1"/>
-          <p:nvPr/>
-        </p:nvSpPr>
-        <p:spPr>
-          <a:xfrm>
-            <a:off x="10607040" y="6419088"/>
-            <a:ext cx="1097280" cy="274320"/>
-          </a:xfrm>
-          <a:prstGeom prst="rect">
-            <a:avLst/>
-          </a:prstGeom>
-          <a:noFill/>
-        </p:spPr>
-        <p:txBody>
-          <a:bodyPr wrap="none">
-            <a:spAutoFit/>
-          </a:bodyPr>
-          <a:lstStyle/>
-          <a:p>
-            <a:pPr algn="r"/>
-            <a:r>
-              <a:rPr sz="1000" b="1">
-                <a:solidFill>
-                  <a:srgbClr val="6A7280"/>
-                </a:solidFill>
-                <a:latin typeface="Microsoft YaHei"/>
-              </a:rPr>
-              <a:t>14</a:t>
-            </a:r>
-          </a:p>
-        </p:txBody>
-      </p:sp>
-      <p:sp>
-        <p:nvSpPr>
-          <p:cNvPr id="5" name="TextBox 4"/>
-          <p:cNvSpPr txBox="1"/>
-          <p:nvPr/>
-        </p:nvSpPr>
-        <p:spPr>
-          <a:xfrm>
-            <a:off x="548640" y="457200"/>
-            <a:ext cx="11064240" cy="777240"/>
-          </a:xfrm>
-          <a:prstGeom prst="rect">
-            <a:avLst/>
-          </a:prstGeom>
-          <a:noFill/>
-        </p:spPr>
-        <p:txBody>
-          <a:bodyPr wrap="square" lIns="18288" rIns="18288" tIns="9144" bIns="9144" anchor="ctr">
-            <a:spAutoFit/>
-          </a:bodyPr>
-          <a:lstStyle/>
-          <a:p>
-            <a:pPr algn="l"/>
-            <a:r>
-              <a:rPr sz="2800" b="1" i="0">
-                <a:solidFill>
-                  <a:srgbClr val="0F2B4C"/>
-                </a:solidFill>
-                <a:latin typeface="Microsoft YaHei"/>
-              </a:rPr>
-              <a:t/>
-            </a:r>
-          </a:p>
-        </p:txBody>
-      </p:sp>
-      <p:sp>
-        <p:nvSpPr>
-          <p:cNvPr id="6" name="Rectangle 5"/>
+          <p:cNvPr id="3" name="Rectangle 2"/>
           <p:cNvSpPr/>
           <p:nvPr/>
         </p:nvSpPr>
         <p:spPr>
           <a:xfrm>
-            <a:off x="566928" y="1298448"/>
-            <a:ext cx="1234440" cy="82296"/>
+            <a:off x="594360" y="6263640"/>
+            <a:ext cx="10972800" cy="13716"/>
           </a:xfrm>
           <a:prstGeom prst="rect">
             <a:avLst/>
@@ -5345,7 +5381,156 @@
       </p:sp>
       <p:sp>
         <p:nvSpPr>
-          <p:cNvPr id="7" name="TextBox 6"/>
+          <p:cNvPr id="4" name="TextBox 3"/>
+          <p:cNvSpPr txBox="1"/>
+          <p:nvPr/>
+        </p:nvSpPr>
+        <p:spPr>
+          <a:xfrm>
+            <a:off x="457200" y="6419088"/>
+            <a:ext cx="3657600" cy="274320"/>
+          </a:xfrm>
+          <a:prstGeom prst="rect">
+            <a:avLst/>
+          </a:prstGeom>
+          <a:noFill/>
+        </p:spPr>
+        <p:txBody>
+          <a:bodyPr wrap="none">
+            <a:spAutoFit/>
+          </a:bodyPr>
+          <a:lstStyle/>
+          <a:p>
+            <a:pPr algn="l"/>
+            <a:r>
+              <a:rPr sz="900" b="0">
+                <a:solidFill>
+                  <a:srgbClr val="6A7280"/>
+                </a:solidFill>
+                <a:latin typeface="Microsoft YaHei"/>
+              </a:rPr>
+              <a:t>LESSONFORGE 微课</a:t>
+            </a:r>
+          </a:p>
+        </p:txBody>
+      </p:sp>
+      <p:sp>
+        <p:nvSpPr>
+          <p:cNvPr id="5" name="TextBox 4"/>
+          <p:cNvSpPr txBox="1"/>
+          <p:nvPr/>
+        </p:nvSpPr>
+        <p:spPr>
+          <a:xfrm>
+            <a:off x="10607040" y="6419088"/>
+            <a:ext cx="1097280" cy="274320"/>
+          </a:xfrm>
+          <a:prstGeom prst="rect">
+            <a:avLst/>
+          </a:prstGeom>
+          <a:noFill/>
+        </p:spPr>
+        <p:txBody>
+          <a:bodyPr wrap="none">
+            <a:spAutoFit/>
+          </a:bodyPr>
+          <a:lstStyle/>
+          <a:p>
+            <a:pPr algn="r"/>
+            <a:r>
+              <a:rPr sz="1000" b="1">
+                <a:solidFill>
+                  <a:srgbClr val="6A7280"/>
+                </a:solidFill>
+                <a:latin typeface="Microsoft YaHei"/>
+              </a:rPr>
+              <a:t>14</a:t>
+            </a:r>
+          </a:p>
+        </p:txBody>
+      </p:sp>
+      <p:sp>
+        <p:nvSpPr>
+          <p:cNvPr id="6" name="TextBox 5"/>
+          <p:cNvSpPr txBox="1"/>
+          <p:nvPr/>
+        </p:nvSpPr>
+        <p:spPr>
+          <a:xfrm>
+            <a:off x="594360" y="502920"/>
+            <a:ext cx="10789920" cy="731520"/>
+          </a:xfrm>
+          <a:prstGeom prst="rect">
+            <a:avLst/>
+          </a:prstGeom>
+          <a:noFill/>
+        </p:spPr>
+        <p:txBody>
+          <a:bodyPr wrap="square" lIns="18288" rIns="18288" tIns="9144" bIns="9144" anchor="ctr">
+            <a:spAutoFit/>
+          </a:bodyPr>
+          <a:lstStyle/>
+          <a:p>
+            <a:pPr algn="l"/>
+            <a:r>
+              <a:rPr sz="2800" b="1" i="0">
+                <a:solidFill>
+                  <a:srgbClr val="0F2B4C"/>
+                </a:solidFill>
+                <a:latin typeface="Microsoft YaHei"/>
+              </a:rPr>
+              <a:t/>
+            </a:r>
+          </a:p>
+        </p:txBody>
+      </p:sp>
+      <p:sp>
+        <p:nvSpPr>
+          <p:cNvPr id="7" name="Rectangle 6"/>
+          <p:cNvSpPr/>
+          <p:nvPr/>
+        </p:nvSpPr>
+        <p:spPr>
+          <a:xfrm>
+            <a:off x="621792" y="1298448"/>
+            <a:ext cx="1234440" cy="82296"/>
+          </a:xfrm>
+          <a:prstGeom prst="rect">
+            <a:avLst/>
+          </a:prstGeom>
+          <a:solidFill>
+            <a:srgbClr val="0F2B4C"/>
+          </a:solidFill>
+          <a:ln>
+            <a:noFill/>
+          </a:ln>
+          <a:effectLst/>
+        </p:spPr>
+        <p:style>
+          <a:lnRef idx="1">
+            <a:schemeClr val="accent1"/>
+          </a:lnRef>
+          <a:fillRef idx="3">
+            <a:schemeClr val="accent1"/>
+          </a:fillRef>
+          <a:effectRef idx="2">
+            <a:schemeClr val="accent1"/>
+          </a:effectRef>
+          <a:fontRef idx="minor">
+            <a:schemeClr val="lt1"/>
+          </a:fontRef>
+        </p:style>
+        <p:txBody>
+          <a:bodyPr rtlCol="0" anchor="ctr"/>
+          <a:lstStyle/>
+          <a:p>
+            <a:pPr algn="ctr"/>
+          </a:p>
+        </p:txBody>
+      </p:sp>
+      <p:sp>
+        <p:nvSpPr>
+          <p:cNvPr id="8" name="TextBox 7"/>
           <p:cNvSpPr txBox="1"/>
           <p:nvPr/>
         </p:nvSpPr>
@@ -5380,7 +5565,7 @@
       </p:sp>
       <p:sp>
         <p:nvSpPr>
-          <p:cNvPr id="8" name="TextBox 7"/>
+          <p:cNvPr id="9" name="TextBox 8"/>
           <p:cNvSpPr txBox="1"/>
           <p:nvPr/>
         </p:nvSpPr>
@@ -5415,14 +5600,14 @@
       </p:sp>
       <p:sp>
         <p:nvSpPr>
-          <p:cNvPr id="9" name="TextBox 8"/>
+          <p:cNvPr id="10" name="TextBox 9"/>
           <p:cNvSpPr txBox="1"/>
           <p:nvPr/>
         </p:nvSpPr>
         <p:spPr>
           <a:xfrm>
             <a:off x="914400" y="3611880"/>
-            <a:ext cx="5029200" cy="685800"/>
+            <a:ext cx="5029200" cy="658368"/>
           </a:xfrm>
           <a:prstGeom prst="rect">
             <a:avLst/>
@@ -5450,14 +5635,14 @@
       </p:sp>
       <p:sp>
         <p:nvSpPr>
-          <p:cNvPr id="10" name="TextBox 9"/>
+          <p:cNvPr id="11" name="TextBox 10"/>
           <p:cNvSpPr txBox="1"/>
           <p:nvPr/>
         </p:nvSpPr>
         <p:spPr>
           <a:xfrm>
             <a:off x="6217920" y="3611880"/>
-            <a:ext cx="5029200" cy="685800"/>
+            <a:ext cx="5029200" cy="658368"/>
           </a:xfrm>
           <a:prstGeom prst="rect">
             <a:avLst/>
@@ -5485,14 +5670,14 @@
       </p:sp>
       <p:sp>
         <p:nvSpPr>
-          <p:cNvPr id="11" name="TextBox 10"/>
-          <p:cNvSpPr txBox="1"/>
-          <p:nvPr/>
-        </p:nvSpPr>
-        <p:spPr>
-          <a:xfrm>
-            <a:off x="914400" y="4434840"/>
-            <a:ext cx="5029200" cy="685800"/>
+          <p:cNvPr id="12" name="TextBox 11"/>
+          <p:cNvSpPr txBox="1"/>
+          <p:nvPr/>
+        </p:nvSpPr>
+        <p:spPr>
+          <a:xfrm>
+            <a:off x="914400" y="5093208"/>
+            <a:ext cx="5029200" cy="658368"/>
           </a:xfrm>
           <a:prstGeom prst="rect">
             <a:avLst/>
@@ -5520,14 +5705,14 @@
       </p:sp>
       <p:sp>
         <p:nvSpPr>
-          <p:cNvPr id="12" name="TextBox 11"/>
-          <p:cNvSpPr txBox="1"/>
-          <p:nvPr/>
-        </p:nvSpPr>
-        <p:spPr>
-          <a:xfrm>
-            <a:off x="6217920" y="4434840"/>
-            <a:ext cx="5029200" cy="685800"/>
+          <p:cNvPr id="13" name="TextBox 12"/>
+          <p:cNvSpPr txBox="1"/>
+          <p:nvPr/>
+        </p:nvSpPr>
+        <p:spPr>
+          <a:xfrm>
+            <a:off x="6217920" y="5093208"/>
+            <a:ext cx="5029200" cy="658368"/>
           </a:xfrm>
           <a:prstGeom prst="rect">
             <a:avLst/>
@@ -5581,16 +5766,16 @@
       <p:grpSpPr/>
       <p:sp>
         <p:nvSpPr>
-          <p:cNvPr id="2" name="Oval 1"/>
+          <p:cNvPr id="2" name="Rectangle 1"/>
           <p:cNvSpPr/>
           <p:nvPr/>
         </p:nvSpPr>
         <p:spPr>
           <a:xfrm>
-            <a:off x="-1463040" y="4389120"/>
-            <a:ext cx="4572000" cy="4572000"/>
-          </a:xfrm>
-          <a:prstGeom prst="ellipse">
+            <a:off x="0" y="0"/>
+            <a:ext cx="12191695" cy="320040"/>
+          </a:xfrm>
+          <a:prstGeom prst="rect">
             <a:avLst/>
           </a:prstGeom>
           <a:solidFill>
@@ -5631,8 +5816,8 @@
         </p:nvSpPr>
         <p:spPr>
           <a:xfrm>
-            <a:off x="868680" y="6263640"/>
-            <a:ext cx="5486400" cy="365760"/>
+            <a:off x="868680" y="6309360"/>
+            <a:ext cx="3657600" cy="365760"/>
           </a:xfrm>
           <a:prstGeom prst="rect">
             <a:avLst/>
@@ -5666,8 +5851,8 @@
         </p:nvSpPr>
         <p:spPr>
           <a:xfrm>
-            <a:off x="914400" y="2011680"/>
-            <a:ext cx="10332720" cy="1188720"/>
+            <a:off x="1097280" y="2194560"/>
+            <a:ext cx="10058400" cy="1188720"/>
           </a:xfrm>
           <a:prstGeom prst="rect">
             <a:avLst/>
@@ -5701,8 +5886,8 @@
         </p:nvSpPr>
         <p:spPr>
           <a:xfrm>
-            <a:off x="914400" y="3474720"/>
-            <a:ext cx="10332720" cy="822960"/>
+            <a:off x="1097280" y="3611880"/>
+            <a:ext cx="10058400" cy="731520"/>
           </a:xfrm>
           <a:prstGeom prst="rect">
             <a:avLst/>
@@ -5719,7 +5904,7 @@
             <a:r>
               <a:rPr sz="2000" b="0" i="0">
                 <a:solidFill>
-                  <a:srgbClr val="FFFFFF"/>
+                  <a:srgbClr val="E3E8EE"/>
                 </a:solidFill>
                 <a:latin typeface="Microsoft YaHei"/>
               </a:rPr>
@@ -5763,7 +5948,7 @@
         <p:spPr>
           <a:xfrm>
             <a:off x="0" y="0"/>
-            <a:ext cx="118872" cy="6858000"/>
+            <a:ext cx="12191695" cy="91440"/>
           </a:xfrm>
           <a:prstGeom prst="rect">
             <a:avLst/>
@@ -5800,119 +5985,14 @@
       </p:sp>
       <p:sp>
         <p:nvSpPr>
-          <p:cNvPr id="3" name="TextBox 2"/>
-          <p:cNvSpPr txBox="1"/>
-          <p:nvPr/>
-        </p:nvSpPr>
-        <p:spPr>
-          <a:xfrm>
-            <a:off x="457200" y="6419088"/>
-            <a:ext cx="3657600" cy="274320"/>
-          </a:xfrm>
-          <a:prstGeom prst="rect">
-            <a:avLst/>
-          </a:prstGeom>
-          <a:noFill/>
-        </p:spPr>
-        <p:txBody>
-          <a:bodyPr wrap="none">
-            <a:spAutoFit/>
-          </a:bodyPr>
-          <a:lstStyle/>
-          <a:p>
-            <a:pPr algn="l"/>
-            <a:r>
-              <a:rPr sz="900" b="0">
-                <a:solidFill>
-                  <a:srgbClr val="6A7280"/>
-                </a:solidFill>
-                <a:latin typeface="Microsoft YaHei"/>
-              </a:rPr>
-              <a:t>LESSONFORGE 微课</a:t>
-            </a:r>
-          </a:p>
-        </p:txBody>
-      </p:sp>
-      <p:sp>
-        <p:nvSpPr>
-          <p:cNvPr id="4" name="TextBox 3"/>
-          <p:cNvSpPr txBox="1"/>
-          <p:nvPr/>
-        </p:nvSpPr>
-        <p:spPr>
-          <a:xfrm>
-            <a:off x="10607040" y="6419088"/>
-            <a:ext cx="1097280" cy="274320"/>
-          </a:xfrm>
-          <a:prstGeom prst="rect">
-            <a:avLst/>
-          </a:prstGeom>
-          <a:noFill/>
-        </p:spPr>
-        <p:txBody>
-          <a:bodyPr wrap="none">
-            <a:spAutoFit/>
-          </a:bodyPr>
-          <a:lstStyle/>
-          <a:p>
-            <a:pPr algn="r"/>
-            <a:r>
-              <a:rPr sz="1000" b="1">
-                <a:solidFill>
-                  <a:srgbClr val="6A7280"/>
-                </a:solidFill>
-                <a:latin typeface="Microsoft YaHei"/>
-              </a:rPr>
-              <a:t>02</a:t>
-            </a:r>
-          </a:p>
-        </p:txBody>
-      </p:sp>
-      <p:sp>
-        <p:nvSpPr>
-          <p:cNvPr id="5" name="TextBox 4"/>
-          <p:cNvSpPr txBox="1"/>
-          <p:nvPr/>
-        </p:nvSpPr>
-        <p:spPr>
-          <a:xfrm>
-            <a:off x="548640" y="457200"/>
-            <a:ext cx="11064240" cy="777240"/>
-          </a:xfrm>
-          <a:prstGeom prst="rect">
-            <a:avLst/>
-          </a:prstGeom>
-          <a:noFill/>
-        </p:spPr>
-        <p:txBody>
-          <a:bodyPr wrap="square" lIns="18288" rIns="18288" tIns="9144" bIns="9144" anchor="ctr">
-            <a:spAutoFit/>
-          </a:bodyPr>
-          <a:lstStyle/>
-          <a:p>
-            <a:pPr algn="l"/>
-            <a:r>
-              <a:rPr sz="2800" b="1" i="0">
-                <a:solidFill>
-                  <a:srgbClr val="0F2B4C"/>
-                </a:solidFill>
-                <a:latin typeface="Microsoft YaHei"/>
-              </a:rPr>
-              <a:t/>
-            </a:r>
-          </a:p>
-        </p:txBody>
-      </p:sp>
-      <p:sp>
-        <p:nvSpPr>
-          <p:cNvPr id="6" name="Rectangle 5"/>
+          <p:cNvPr id="3" name="Rectangle 2"/>
           <p:cNvSpPr/>
           <p:nvPr/>
         </p:nvSpPr>
         <p:spPr>
           <a:xfrm>
-            <a:off x="566928" y="1298448"/>
-            <a:ext cx="1234440" cy="82296"/>
+            <a:off x="594360" y="6263640"/>
+            <a:ext cx="10972800" cy="13716"/>
           </a:xfrm>
           <a:prstGeom prst="rect">
             <a:avLst/>
@@ -5949,14 +6029,84 @@
       </p:sp>
       <p:sp>
         <p:nvSpPr>
-          <p:cNvPr id="7" name="TextBox 6"/>
-          <p:cNvSpPr txBox="1"/>
-          <p:nvPr/>
-        </p:nvSpPr>
-        <p:spPr>
-          <a:xfrm>
-            <a:off x="594360" y="1645920"/>
-            <a:ext cx="10972800" cy="960120"/>
+          <p:cNvPr id="4" name="TextBox 3"/>
+          <p:cNvSpPr txBox="1"/>
+          <p:nvPr/>
+        </p:nvSpPr>
+        <p:spPr>
+          <a:xfrm>
+            <a:off x="457200" y="6419088"/>
+            <a:ext cx="3657600" cy="274320"/>
+          </a:xfrm>
+          <a:prstGeom prst="rect">
+            <a:avLst/>
+          </a:prstGeom>
+          <a:noFill/>
+        </p:spPr>
+        <p:txBody>
+          <a:bodyPr wrap="none">
+            <a:spAutoFit/>
+          </a:bodyPr>
+          <a:lstStyle/>
+          <a:p>
+            <a:pPr algn="l"/>
+            <a:r>
+              <a:rPr sz="900" b="0">
+                <a:solidFill>
+                  <a:srgbClr val="6A7280"/>
+                </a:solidFill>
+                <a:latin typeface="Microsoft YaHei"/>
+              </a:rPr>
+              <a:t>LESSONFORGE 微课</a:t>
+            </a:r>
+          </a:p>
+        </p:txBody>
+      </p:sp>
+      <p:sp>
+        <p:nvSpPr>
+          <p:cNvPr id="5" name="TextBox 4"/>
+          <p:cNvSpPr txBox="1"/>
+          <p:nvPr/>
+        </p:nvSpPr>
+        <p:spPr>
+          <a:xfrm>
+            <a:off x="10607040" y="6419088"/>
+            <a:ext cx="1097280" cy="274320"/>
+          </a:xfrm>
+          <a:prstGeom prst="rect">
+            <a:avLst/>
+          </a:prstGeom>
+          <a:noFill/>
+        </p:spPr>
+        <p:txBody>
+          <a:bodyPr wrap="none">
+            <a:spAutoFit/>
+          </a:bodyPr>
+          <a:lstStyle/>
+          <a:p>
+            <a:pPr algn="r"/>
+            <a:r>
+              <a:rPr sz="1000" b="1">
+                <a:solidFill>
+                  <a:srgbClr val="6A7280"/>
+                </a:solidFill>
+                <a:latin typeface="Microsoft YaHei"/>
+              </a:rPr>
+              <a:t>02</a:t>
+            </a:r>
+          </a:p>
+        </p:txBody>
+      </p:sp>
+      <p:sp>
+        <p:nvSpPr>
+          <p:cNvPr id="6" name="TextBox 5"/>
+          <p:cNvSpPr txBox="1"/>
+          <p:nvPr/>
+        </p:nvSpPr>
+        <p:spPr>
+          <a:xfrm>
+            <a:off x="594360" y="502920"/>
+            <a:ext cx="10789920" cy="731520"/>
           </a:xfrm>
           <a:prstGeom prst="rect">
             <a:avLst/>
@@ -5971,6 +6121,85 @@
           <a:p>
             <a:pPr algn="l"/>
             <a:r>
+              <a:rPr sz="2800" b="1" i="0">
+                <a:solidFill>
+                  <a:srgbClr val="0F2B4C"/>
+                </a:solidFill>
+                <a:latin typeface="Microsoft YaHei"/>
+              </a:rPr>
+              <a:t/>
+            </a:r>
+          </a:p>
+        </p:txBody>
+      </p:sp>
+      <p:sp>
+        <p:nvSpPr>
+          <p:cNvPr id="7" name="Rectangle 6"/>
+          <p:cNvSpPr/>
+          <p:nvPr/>
+        </p:nvSpPr>
+        <p:spPr>
+          <a:xfrm>
+            <a:off x="621792" y="1298448"/>
+            <a:ext cx="1234440" cy="82296"/>
+          </a:xfrm>
+          <a:prstGeom prst="rect">
+            <a:avLst/>
+          </a:prstGeom>
+          <a:solidFill>
+            <a:srgbClr val="0F2B4C"/>
+          </a:solidFill>
+          <a:ln>
+            <a:noFill/>
+          </a:ln>
+          <a:effectLst/>
+        </p:spPr>
+        <p:style>
+          <a:lnRef idx="1">
+            <a:schemeClr val="accent1"/>
+          </a:lnRef>
+          <a:fillRef idx="3">
+            <a:schemeClr val="accent1"/>
+          </a:fillRef>
+          <a:effectRef idx="2">
+            <a:schemeClr val="accent1"/>
+          </a:effectRef>
+          <a:fontRef idx="minor">
+            <a:schemeClr val="lt1"/>
+          </a:fontRef>
+        </p:style>
+        <p:txBody>
+          <a:bodyPr rtlCol="0" anchor="ctr"/>
+          <a:lstStyle/>
+          <a:p>
+            <a:pPr algn="ctr"/>
+          </a:p>
+        </p:txBody>
+      </p:sp>
+      <p:sp>
+        <p:nvSpPr>
+          <p:cNvPr id="8" name="TextBox 7"/>
+          <p:cNvSpPr txBox="1"/>
+          <p:nvPr/>
+        </p:nvSpPr>
+        <p:spPr>
+          <a:xfrm>
+            <a:off x="594360" y="1691640"/>
+            <a:ext cx="10972800" cy="914400"/>
+          </a:xfrm>
+          <a:prstGeom prst="rect">
+            <a:avLst/>
+          </a:prstGeom>
+          <a:noFill/>
+        </p:spPr>
+        <p:txBody>
+          <a:bodyPr wrap="square" lIns="18288" rIns="18288" tIns="9144" bIns="9144" anchor="ctr">
+            <a:spAutoFit/>
+          </a:bodyPr>
+          <a:lstStyle/>
+          <a:p>
+            <a:pPr algn="l"/>
+            <a:r>
               <a:rPr sz="1800" b="1" i="0">
                 <a:solidFill>
                   <a:srgbClr val="0F2B4C"/>
@@ -5984,14 +6213,14 @@
       </p:sp>
       <p:sp>
         <p:nvSpPr>
-          <p:cNvPr id="8" name="TextBox 7"/>
-          <p:cNvSpPr txBox="1"/>
-          <p:nvPr/>
-        </p:nvSpPr>
-        <p:spPr>
-          <a:xfrm>
-            <a:off x="594360" y="2788920"/>
-            <a:ext cx="10972800" cy="566928"/>
+          <p:cNvPr id="9" name="TextBox 8"/>
+          <p:cNvSpPr txBox="1"/>
+          <p:nvPr/>
+        </p:nvSpPr>
+        <p:spPr>
+          <a:xfrm>
+            <a:off x="594360" y="2834640"/>
+            <a:ext cx="5394960" cy="777240"/>
           </a:xfrm>
           <a:prstGeom prst="rect">
             <a:avLst/>
@@ -6019,14 +6248,14 @@
       </p:sp>
       <p:sp>
         <p:nvSpPr>
-          <p:cNvPr id="9" name="TextBox 8"/>
-          <p:cNvSpPr txBox="1"/>
-          <p:nvPr/>
-        </p:nvSpPr>
-        <p:spPr>
-          <a:xfrm>
-            <a:off x="594360" y="3447288"/>
-            <a:ext cx="10972800" cy="566928"/>
+          <p:cNvPr id="10" name="TextBox 9"/>
+          <p:cNvSpPr txBox="1"/>
+          <p:nvPr/>
+        </p:nvSpPr>
+        <p:spPr>
+          <a:xfrm>
+            <a:off x="6263640" y="2834640"/>
+            <a:ext cx="5394960" cy="777240"/>
           </a:xfrm>
           <a:prstGeom prst="rect">
             <a:avLst/>
@@ -6054,14 +6283,14 @@
       </p:sp>
       <p:sp>
         <p:nvSpPr>
-          <p:cNvPr id="10" name="TextBox 9"/>
-          <p:cNvSpPr txBox="1"/>
-          <p:nvPr/>
-        </p:nvSpPr>
-        <p:spPr>
-          <a:xfrm>
-            <a:off x="594360" y="4105656"/>
-            <a:ext cx="10972800" cy="566928"/>
+          <p:cNvPr id="11" name="TextBox 10"/>
+          <p:cNvSpPr txBox="1"/>
+          <p:nvPr/>
+        </p:nvSpPr>
+        <p:spPr>
+          <a:xfrm>
+            <a:off x="594360" y="4069080"/>
+            <a:ext cx="5394960" cy="777240"/>
           </a:xfrm>
           <a:prstGeom prst="rect">
             <a:avLst/>
@@ -6089,14 +6318,14 @@
       </p:sp>
       <p:sp>
         <p:nvSpPr>
-          <p:cNvPr id="11" name="TextBox 10"/>
-          <p:cNvSpPr txBox="1"/>
-          <p:nvPr/>
-        </p:nvSpPr>
-        <p:spPr>
-          <a:xfrm>
-            <a:off x="594360" y="4764024"/>
-            <a:ext cx="10972800" cy="566928"/>
+          <p:cNvPr id="12" name="TextBox 11"/>
+          <p:cNvSpPr txBox="1"/>
+          <p:nvPr/>
+        </p:nvSpPr>
+        <p:spPr>
+          <a:xfrm>
+            <a:off x="6263640" y="4069080"/>
+            <a:ext cx="5394960" cy="777240"/>
           </a:xfrm>
           <a:prstGeom prst="rect">
             <a:avLst/>
@@ -6124,14 +6353,49 @@
       </p:sp>
       <p:sp>
         <p:nvSpPr>
-          <p:cNvPr id="12" name="TextBox 11"/>
-          <p:cNvSpPr txBox="1"/>
-          <p:nvPr/>
-        </p:nvSpPr>
-        <p:spPr>
-          <a:xfrm>
-            <a:off x="594360" y="5422392"/>
-            <a:ext cx="10972800" cy="566928"/>
+          <p:cNvPr id="13" name="TextBox 12"/>
+          <p:cNvSpPr txBox="1"/>
+          <p:nvPr/>
+        </p:nvSpPr>
+        <p:spPr>
+          <a:xfrm>
+            <a:off x="594360" y="5303520"/>
+            <a:ext cx="5394960" cy="777240"/>
+          </a:xfrm>
+          <a:prstGeom prst="rect">
+            <a:avLst/>
+          </a:prstGeom>
+          <a:noFill/>
+        </p:spPr>
+        <p:txBody>
+          <a:bodyPr wrap="square" lIns="18288" rIns="18288" tIns="9144" bIns="9144" anchor="ctr">
+            <a:spAutoFit/>
+          </a:bodyPr>
+          <a:lstStyle/>
+          <a:p>
+            <a:pPr algn="l"/>
+            <a:r>
+              <a:rPr sz="1600" b="0" i="0">
+                <a:solidFill>
+                  <a:srgbClr val="14181F"/>
+                </a:solidFill>
+                <a:latin typeface="Microsoft YaHei"/>
+              </a:rPr>
+              <a:t/>
+            </a:r>
+          </a:p>
+        </p:txBody>
+      </p:sp>
+      <p:sp>
+        <p:nvSpPr>
+          <p:cNvPr id="14" name="TextBox 13"/>
+          <p:cNvSpPr txBox="1"/>
+          <p:nvPr/>
+        </p:nvSpPr>
+        <p:spPr>
+          <a:xfrm>
+            <a:off x="6263640" y="5303520"/>
+            <a:ext cx="5394960" cy="777240"/>
           </a:xfrm>
           <a:prstGeom prst="rect">
             <a:avLst/>
@@ -6192,7 +6456,7 @@
         <p:spPr>
           <a:xfrm>
             <a:off x="0" y="0"/>
-            <a:ext cx="118872" cy="6858000"/>
+            <a:ext cx="12191695" cy="91440"/>
           </a:xfrm>
           <a:prstGeom prst="rect">
             <a:avLst/>
@@ -6229,119 +6493,14 @@
       </p:sp>
       <p:sp>
         <p:nvSpPr>
-          <p:cNvPr id="3" name="TextBox 2"/>
-          <p:cNvSpPr txBox="1"/>
-          <p:nvPr/>
-        </p:nvSpPr>
-        <p:spPr>
-          <a:xfrm>
-            <a:off x="457200" y="6419088"/>
-            <a:ext cx="3657600" cy="274320"/>
-          </a:xfrm>
-          <a:prstGeom prst="rect">
-            <a:avLst/>
-          </a:prstGeom>
-          <a:noFill/>
-        </p:spPr>
-        <p:txBody>
-          <a:bodyPr wrap="none">
-            <a:spAutoFit/>
-          </a:bodyPr>
-          <a:lstStyle/>
-          <a:p>
-            <a:pPr algn="l"/>
-            <a:r>
-              <a:rPr sz="900" b="0">
-                <a:solidFill>
-                  <a:srgbClr val="6A7280"/>
-                </a:solidFill>
-                <a:latin typeface="Microsoft YaHei"/>
-              </a:rPr>
-              <a:t>LESSONFORGE 微课</a:t>
-            </a:r>
-          </a:p>
-        </p:txBody>
-      </p:sp>
-      <p:sp>
-        <p:nvSpPr>
-          <p:cNvPr id="4" name="TextBox 3"/>
-          <p:cNvSpPr txBox="1"/>
-          <p:nvPr/>
-        </p:nvSpPr>
-        <p:spPr>
-          <a:xfrm>
-            <a:off x="10607040" y="6419088"/>
-            <a:ext cx="1097280" cy="274320"/>
-          </a:xfrm>
-          <a:prstGeom prst="rect">
-            <a:avLst/>
-          </a:prstGeom>
-          <a:noFill/>
-        </p:spPr>
-        <p:txBody>
-          <a:bodyPr wrap="none">
-            <a:spAutoFit/>
-          </a:bodyPr>
-          <a:lstStyle/>
-          <a:p>
-            <a:pPr algn="r"/>
-            <a:r>
-              <a:rPr sz="1000" b="1">
-                <a:solidFill>
-                  <a:srgbClr val="6A7280"/>
-                </a:solidFill>
-                <a:latin typeface="Microsoft YaHei"/>
-              </a:rPr>
-              <a:t>03</a:t>
-            </a:r>
-          </a:p>
-        </p:txBody>
-      </p:sp>
-      <p:sp>
-        <p:nvSpPr>
-          <p:cNvPr id="5" name="TextBox 4"/>
-          <p:cNvSpPr txBox="1"/>
-          <p:nvPr/>
-        </p:nvSpPr>
-        <p:spPr>
-          <a:xfrm>
-            <a:off x="548640" y="457200"/>
-            <a:ext cx="11064240" cy="777240"/>
-          </a:xfrm>
-          <a:prstGeom prst="rect">
-            <a:avLst/>
-          </a:prstGeom>
-          <a:noFill/>
-        </p:spPr>
-        <p:txBody>
-          <a:bodyPr wrap="square" lIns="18288" rIns="18288" tIns="9144" bIns="9144" anchor="ctr">
-            <a:spAutoFit/>
-          </a:bodyPr>
-          <a:lstStyle/>
-          <a:p>
-            <a:pPr algn="l"/>
-            <a:r>
-              <a:rPr sz="2800" b="1" i="0">
-                <a:solidFill>
-                  <a:srgbClr val="0F2B4C"/>
-                </a:solidFill>
-                <a:latin typeface="Microsoft YaHei"/>
-              </a:rPr>
-              <a:t/>
-            </a:r>
-          </a:p>
-        </p:txBody>
-      </p:sp>
-      <p:sp>
-        <p:nvSpPr>
-          <p:cNvPr id="6" name="Rectangle 5"/>
+          <p:cNvPr id="3" name="Rectangle 2"/>
           <p:cNvSpPr/>
           <p:nvPr/>
         </p:nvSpPr>
         <p:spPr>
           <a:xfrm>
-            <a:off x="566928" y="1298448"/>
-            <a:ext cx="1234440" cy="82296"/>
+            <a:off x="594360" y="6263640"/>
+            <a:ext cx="10972800" cy="13716"/>
           </a:xfrm>
           <a:prstGeom prst="rect">
             <a:avLst/>
@@ -6378,14 +6537,84 @@
       </p:sp>
       <p:sp>
         <p:nvSpPr>
-          <p:cNvPr id="7" name="TextBox 6"/>
-          <p:cNvSpPr txBox="1"/>
-          <p:nvPr/>
-        </p:nvSpPr>
-        <p:spPr>
-          <a:xfrm>
-            <a:off x="594360" y="1737360"/>
-            <a:ext cx="10972800" cy="640080"/>
+          <p:cNvPr id="4" name="TextBox 3"/>
+          <p:cNvSpPr txBox="1"/>
+          <p:nvPr/>
+        </p:nvSpPr>
+        <p:spPr>
+          <a:xfrm>
+            <a:off x="457200" y="6419088"/>
+            <a:ext cx="3657600" cy="274320"/>
+          </a:xfrm>
+          <a:prstGeom prst="rect">
+            <a:avLst/>
+          </a:prstGeom>
+          <a:noFill/>
+        </p:spPr>
+        <p:txBody>
+          <a:bodyPr wrap="none">
+            <a:spAutoFit/>
+          </a:bodyPr>
+          <a:lstStyle/>
+          <a:p>
+            <a:pPr algn="l"/>
+            <a:r>
+              <a:rPr sz="900" b="0">
+                <a:solidFill>
+                  <a:srgbClr val="6A7280"/>
+                </a:solidFill>
+                <a:latin typeface="Microsoft YaHei"/>
+              </a:rPr>
+              <a:t>LESSONFORGE 微课</a:t>
+            </a:r>
+          </a:p>
+        </p:txBody>
+      </p:sp>
+      <p:sp>
+        <p:nvSpPr>
+          <p:cNvPr id="5" name="TextBox 4"/>
+          <p:cNvSpPr txBox="1"/>
+          <p:nvPr/>
+        </p:nvSpPr>
+        <p:spPr>
+          <a:xfrm>
+            <a:off x="10607040" y="6419088"/>
+            <a:ext cx="1097280" cy="274320"/>
+          </a:xfrm>
+          <a:prstGeom prst="rect">
+            <a:avLst/>
+          </a:prstGeom>
+          <a:noFill/>
+        </p:spPr>
+        <p:txBody>
+          <a:bodyPr wrap="none">
+            <a:spAutoFit/>
+          </a:bodyPr>
+          <a:lstStyle/>
+          <a:p>
+            <a:pPr algn="r"/>
+            <a:r>
+              <a:rPr sz="1000" b="1">
+                <a:solidFill>
+                  <a:srgbClr val="6A7280"/>
+                </a:solidFill>
+                <a:latin typeface="Microsoft YaHei"/>
+              </a:rPr>
+              <a:t>03</a:t>
+            </a:r>
+          </a:p>
+        </p:txBody>
+      </p:sp>
+      <p:sp>
+        <p:nvSpPr>
+          <p:cNvPr id="6" name="TextBox 5"/>
+          <p:cNvSpPr txBox="1"/>
+          <p:nvPr/>
+        </p:nvSpPr>
+        <p:spPr>
+          <a:xfrm>
+            <a:off x="594360" y="502920"/>
+            <a:ext cx="10789920" cy="731520"/>
           </a:xfrm>
           <a:prstGeom prst="rect">
             <a:avLst/>
@@ -6400,7 +6629,7 @@
           <a:p>
             <a:pPr algn="l"/>
             <a:r>
-              <a:rPr sz="1800" b="1" i="0">
+              <a:rPr sz="2800" b="1" i="0">
                 <a:solidFill>
                   <a:srgbClr val="0F2B4C"/>
                 </a:solidFill>
@@ -6413,14 +6642,58 @@
       </p:sp>
       <p:sp>
         <p:nvSpPr>
+          <p:cNvPr id="7" name="Rectangle 6"/>
+          <p:cNvSpPr/>
+          <p:nvPr/>
+        </p:nvSpPr>
+        <p:spPr>
+          <a:xfrm>
+            <a:off x="621792" y="1298448"/>
+            <a:ext cx="1234440" cy="82296"/>
+          </a:xfrm>
+          <a:prstGeom prst="rect">
+            <a:avLst/>
+          </a:prstGeom>
+          <a:solidFill>
+            <a:srgbClr val="0F2B4C"/>
+          </a:solidFill>
+          <a:ln>
+            <a:noFill/>
+          </a:ln>
+          <a:effectLst/>
+        </p:spPr>
+        <p:style>
+          <a:lnRef idx="1">
+            <a:schemeClr val="accent1"/>
+          </a:lnRef>
+          <a:fillRef idx="3">
+            <a:schemeClr val="accent1"/>
+          </a:fillRef>
+          <a:effectRef idx="2">
+            <a:schemeClr val="accent1"/>
+          </a:effectRef>
+          <a:fontRef idx="minor">
+            <a:schemeClr val="lt1"/>
+          </a:fontRef>
+        </p:style>
+        <p:txBody>
+          <a:bodyPr rtlCol="0" anchor="ctr"/>
+          <a:lstStyle/>
+          <a:p>
+            <a:pPr algn="ctr"/>
+          </a:p>
+        </p:txBody>
+      </p:sp>
+      <p:sp>
+        <p:nvSpPr>
           <p:cNvPr id="8" name="TextBox 7"/>
           <p:cNvSpPr txBox="1"/>
           <p:nvPr/>
         </p:nvSpPr>
         <p:spPr>
           <a:xfrm>
-            <a:off x="594360" y="2560320"/>
-            <a:ext cx="10972800" cy="731520"/>
+            <a:off x="594360" y="1783080"/>
+            <a:ext cx="5394960" cy="1051560"/>
           </a:xfrm>
           <a:prstGeom prst="rect">
             <a:avLst/>
@@ -6454,8 +6727,8 @@
         </p:nvSpPr>
         <p:spPr>
           <a:xfrm>
-            <a:off x="594360" y="3429000"/>
-            <a:ext cx="10972800" cy="731520"/>
+            <a:off x="6263640" y="1783080"/>
+            <a:ext cx="5394960" cy="1051560"/>
           </a:xfrm>
           <a:prstGeom prst="rect">
             <a:avLst/>
@@ -6489,8 +6762,8 @@
         </p:nvSpPr>
         <p:spPr>
           <a:xfrm>
-            <a:off x="594360" y="4297680"/>
-            <a:ext cx="10972800" cy="731520"/>
+            <a:off x="594360" y="3337560"/>
+            <a:ext cx="5394960" cy="1051560"/>
           </a:xfrm>
           <a:prstGeom prst="rect">
             <a:avLst/>
@@ -6524,8 +6797,78 @@
         </p:nvSpPr>
         <p:spPr>
           <a:xfrm>
-            <a:off x="594360" y="5166360"/>
-            <a:ext cx="10972800" cy="731520"/>
+            <a:off x="6263640" y="3337560"/>
+            <a:ext cx="5394960" cy="1051560"/>
+          </a:xfrm>
+          <a:prstGeom prst="rect">
+            <a:avLst/>
+          </a:prstGeom>
+          <a:noFill/>
+        </p:spPr>
+        <p:txBody>
+          <a:bodyPr wrap="square" lIns="18288" rIns="18288" tIns="9144" bIns="9144" anchor="ctr">
+            <a:spAutoFit/>
+          </a:bodyPr>
+          <a:lstStyle/>
+          <a:p>
+            <a:pPr algn="l"/>
+            <a:r>
+              <a:rPr sz="1600" b="0" i="0">
+                <a:solidFill>
+                  <a:srgbClr val="14181F"/>
+                </a:solidFill>
+                <a:latin typeface="Microsoft YaHei"/>
+              </a:rPr>
+              <a:t/>
+            </a:r>
+          </a:p>
+        </p:txBody>
+      </p:sp>
+      <p:sp>
+        <p:nvSpPr>
+          <p:cNvPr id="12" name="TextBox 11"/>
+          <p:cNvSpPr txBox="1"/>
+          <p:nvPr/>
+        </p:nvSpPr>
+        <p:spPr>
+          <a:xfrm>
+            <a:off x="594360" y="4892040"/>
+            <a:ext cx="5394960" cy="1051560"/>
+          </a:xfrm>
+          <a:prstGeom prst="rect">
+            <a:avLst/>
+          </a:prstGeom>
+          <a:noFill/>
+        </p:spPr>
+        <p:txBody>
+          <a:bodyPr wrap="square" lIns="18288" rIns="18288" tIns="9144" bIns="9144" anchor="ctr">
+            <a:spAutoFit/>
+          </a:bodyPr>
+          <a:lstStyle/>
+          <a:p>
+            <a:pPr algn="l"/>
+            <a:r>
+              <a:rPr sz="1600" b="0" i="0">
+                <a:solidFill>
+                  <a:srgbClr val="14181F"/>
+                </a:solidFill>
+                <a:latin typeface="Microsoft YaHei"/>
+              </a:rPr>
+              <a:t/>
+            </a:r>
+          </a:p>
+        </p:txBody>
+      </p:sp>
+      <p:sp>
+        <p:nvSpPr>
+          <p:cNvPr id="13" name="TextBox 12"/>
+          <p:cNvSpPr txBox="1"/>
+          <p:nvPr/>
+        </p:nvSpPr>
+        <p:spPr>
+          <a:xfrm>
+            <a:off x="6263640" y="4892040"/>
+            <a:ext cx="5394960" cy="1051560"/>
           </a:xfrm>
           <a:prstGeom prst="rect">
             <a:avLst/>
@@ -6586,7 +6929,7 @@
         <p:spPr>
           <a:xfrm>
             <a:off x="0" y="0"/>
-            <a:ext cx="118872" cy="6858000"/>
+            <a:ext cx="12191695" cy="91440"/>
           </a:xfrm>
           <a:prstGeom prst="rect">
             <a:avLst/>
@@ -6623,119 +6966,14 @@
       </p:sp>
       <p:sp>
         <p:nvSpPr>
-          <p:cNvPr id="3" name="TextBox 2"/>
-          <p:cNvSpPr txBox="1"/>
-          <p:nvPr/>
-        </p:nvSpPr>
-        <p:spPr>
-          <a:xfrm>
-            <a:off x="457200" y="6419088"/>
-            <a:ext cx="3657600" cy="274320"/>
-          </a:xfrm>
-          <a:prstGeom prst="rect">
-            <a:avLst/>
-          </a:prstGeom>
-          <a:noFill/>
-        </p:spPr>
-        <p:txBody>
-          <a:bodyPr wrap="none">
-            <a:spAutoFit/>
-          </a:bodyPr>
-          <a:lstStyle/>
-          <a:p>
-            <a:pPr algn="l"/>
-            <a:r>
-              <a:rPr sz="900" b="0">
-                <a:solidFill>
-                  <a:srgbClr val="6A7280"/>
-                </a:solidFill>
-                <a:latin typeface="Microsoft YaHei"/>
-              </a:rPr>
-              <a:t>LESSONFORGE 微课</a:t>
-            </a:r>
-          </a:p>
-        </p:txBody>
-      </p:sp>
-      <p:sp>
-        <p:nvSpPr>
-          <p:cNvPr id="4" name="TextBox 3"/>
-          <p:cNvSpPr txBox="1"/>
-          <p:nvPr/>
-        </p:nvSpPr>
-        <p:spPr>
-          <a:xfrm>
-            <a:off x="10607040" y="6419088"/>
-            <a:ext cx="1097280" cy="274320"/>
-          </a:xfrm>
-          <a:prstGeom prst="rect">
-            <a:avLst/>
-          </a:prstGeom>
-          <a:noFill/>
-        </p:spPr>
-        <p:txBody>
-          <a:bodyPr wrap="none">
-            <a:spAutoFit/>
-          </a:bodyPr>
-          <a:lstStyle/>
-          <a:p>
-            <a:pPr algn="r"/>
-            <a:r>
-              <a:rPr sz="1000" b="1">
-                <a:solidFill>
-                  <a:srgbClr val="6A7280"/>
-                </a:solidFill>
-                <a:latin typeface="Microsoft YaHei"/>
-              </a:rPr>
-              <a:t>04</a:t>
-            </a:r>
-          </a:p>
-        </p:txBody>
-      </p:sp>
-      <p:sp>
-        <p:nvSpPr>
-          <p:cNvPr id="5" name="TextBox 4"/>
-          <p:cNvSpPr txBox="1"/>
-          <p:nvPr/>
-        </p:nvSpPr>
-        <p:spPr>
-          <a:xfrm>
-            <a:off x="548640" y="457200"/>
-            <a:ext cx="11064240" cy="777240"/>
-          </a:xfrm>
-          <a:prstGeom prst="rect">
-            <a:avLst/>
-          </a:prstGeom>
-          <a:noFill/>
-        </p:spPr>
-        <p:txBody>
-          <a:bodyPr wrap="square" lIns="18288" rIns="18288" tIns="9144" bIns="9144" anchor="ctr">
-            <a:spAutoFit/>
-          </a:bodyPr>
-          <a:lstStyle/>
-          <a:p>
-            <a:pPr algn="l"/>
-            <a:r>
-              <a:rPr sz="2800" b="1" i="0">
-                <a:solidFill>
-                  <a:srgbClr val="0F2B4C"/>
-                </a:solidFill>
-                <a:latin typeface="Microsoft YaHei"/>
-              </a:rPr>
-              <a:t/>
-            </a:r>
-          </a:p>
-        </p:txBody>
-      </p:sp>
-      <p:sp>
-        <p:nvSpPr>
-          <p:cNvPr id="6" name="Rectangle 5"/>
+          <p:cNvPr id="3" name="Rectangle 2"/>
           <p:cNvSpPr/>
           <p:nvPr/>
         </p:nvSpPr>
         <p:spPr>
           <a:xfrm>
-            <a:off x="566928" y="1298448"/>
-            <a:ext cx="1234440" cy="82296"/>
+            <a:off x="594360" y="6263640"/>
+            <a:ext cx="10972800" cy="13716"/>
           </a:xfrm>
           <a:prstGeom prst="rect">
             <a:avLst/>
@@ -6772,14 +7010,84 @@
       </p:sp>
       <p:sp>
         <p:nvSpPr>
-          <p:cNvPr id="7" name="TextBox 6"/>
-          <p:cNvSpPr txBox="1"/>
-          <p:nvPr/>
-        </p:nvSpPr>
-        <p:spPr>
-          <a:xfrm>
-            <a:off x="594360" y="1737360"/>
-            <a:ext cx="10972800" cy="640080"/>
+          <p:cNvPr id="4" name="TextBox 3"/>
+          <p:cNvSpPr txBox="1"/>
+          <p:nvPr/>
+        </p:nvSpPr>
+        <p:spPr>
+          <a:xfrm>
+            <a:off x="457200" y="6419088"/>
+            <a:ext cx="3657600" cy="274320"/>
+          </a:xfrm>
+          <a:prstGeom prst="rect">
+            <a:avLst/>
+          </a:prstGeom>
+          <a:noFill/>
+        </p:spPr>
+        <p:txBody>
+          <a:bodyPr wrap="none">
+            <a:spAutoFit/>
+          </a:bodyPr>
+          <a:lstStyle/>
+          <a:p>
+            <a:pPr algn="l"/>
+            <a:r>
+              <a:rPr sz="900" b="0">
+                <a:solidFill>
+                  <a:srgbClr val="6A7280"/>
+                </a:solidFill>
+                <a:latin typeface="Microsoft YaHei"/>
+              </a:rPr>
+              <a:t>LESSONFORGE 微课</a:t>
+            </a:r>
+          </a:p>
+        </p:txBody>
+      </p:sp>
+      <p:sp>
+        <p:nvSpPr>
+          <p:cNvPr id="5" name="TextBox 4"/>
+          <p:cNvSpPr txBox="1"/>
+          <p:nvPr/>
+        </p:nvSpPr>
+        <p:spPr>
+          <a:xfrm>
+            <a:off x="10607040" y="6419088"/>
+            <a:ext cx="1097280" cy="274320"/>
+          </a:xfrm>
+          <a:prstGeom prst="rect">
+            <a:avLst/>
+          </a:prstGeom>
+          <a:noFill/>
+        </p:spPr>
+        <p:txBody>
+          <a:bodyPr wrap="none">
+            <a:spAutoFit/>
+          </a:bodyPr>
+          <a:lstStyle/>
+          <a:p>
+            <a:pPr algn="r"/>
+            <a:r>
+              <a:rPr sz="1000" b="1">
+                <a:solidFill>
+                  <a:srgbClr val="6A7280"/>
+                </a:solidFill>
+                <a:latin typeface="Microsoft YaHei"/>
+              </a:rPr>
+              <a:t>04</a:t>
+            </a:r>
+          </a:p>
+        </p:txBody>
+      </p:sp>
+      <p:sp>
+        <p:nvSpPr>
+          <p:cNvPr id="6" name="TextBox 5"/>
+          <p:cNvSpPr txBox="1"/>
+          <p:nvPr/>
+        </p:nvSpPr>
+        <p:spPr>
+          <a:xfrm>
+            <a:off x="594360" y="502920"/>
+            <a:ext cx="10789920" cy="731520"/>
           </a:xfrm>
           <a:prstGeom prst="rect">
             <a:avLst/>
@@ -6794,7 +7102,7 @@
           <a:p>
             <a:pPr algn="l"/>
             <a:r>
-              <a:rPr sz="1800" b="1" i="0">
+              <a:rPr sz="2800" b="1" i="0">
                 <a:solidFill>
                   <a:srgbClr val="0F2B4C"/>
                 </a:solidFill>
@@ -6807,14 +7115,58 @@
       </p:sp>
       <p:sp>
         <p:nvSpPr>
+          <p:cNvPr id="7" name="Rectangle 6"/>
+          <p:cNvSpPr/>
+          <p:nvPr/>
+        </p:nvSpPr>
+        <p:spPr>
+          <a:xfrm>
+            <a:off x="621792" y="1298448"/>
+            <a:ext cx="1234440" cy="82296"/>
+          </a:xfrm>
+          <a:prstGeom prst="rect">
+            <a:avLst/>
+          </a:prstGeom>
+          <a:solidFill>
+            <a:srgbClr val="0F2B4C"/>
+          </a:solidFill>
+          <a:ln>
+            <a:noFill/>
+          </a:ln>
+          <a:effectLst/>
+        </p:spPr>
+        <p:style>
+          <a:lnRef idx="1">
+            <a:schemeClr val="accent1"/>
+          </a:lnRef>
+          <a:fillRef idx="3">
+            <a:schemeClr val="accent1"/>
+          </a:fillRef>
+          <a:effectRef idx="2">
+            <a:schemeClr val="accent1"/>
+          </a:effectRef>
+          <a:fontRef idx="minor">
+            <a:schemeClr val="lt1"/>
+          </a:fontRef>
+        </p:style>
+        <p:txBody>
+          <a:bodyPr rtlCol="0" anchor="ctr"/>
+          <a:lstStyle/>
+          <a:p>
+            <a:pPr algn="ctr"/>
+          </a:p>
+        </p:txBody>
+      </p:sp>
+      <p:sp>
+        <p:nvSpPr>
           <p:cNvPr id="8" name="TextBox 7"/>
           <p:cNvSpPr txBox="1"/>
           <p:nvPr/>
         </p:nvSpPr>
         <p:spPr>
           <a:xfrm>
-            <a:off x="594360" y="2606040"/>
-            <a:ext cx="5394960" cy="685800"/>
+            <a:off x="594360" y="1783080"/>
+            <a:ext cx="5394960" cy="1051560"/>
           </a:xfrm>
           <a:prstGeom prst="rect">
             <a:avLst/>
@@ -6848,8 +7200,8 @@
         </p:nvSpPr>
         <p:spPr>
           <a:xfrm>
-            <a:off x="6263640" y="2606040"/>
-            <a:ext cx="5394960" cy="685800"/>
+            <a:off x="6263640" y="1783080"/>
+            <a:ext cx="5394960" cy="1051560"/>
           </a:xfrm>
           <a:prstGeom prst="rect">
             <a:avLst/>
@@ -6883,8 +7235,8 @@
         </p:nvSpPr>
         <p:spPr>
           <a:xfrm>
-            <a:off x="594360" y="3474720"/>
-            <a:ext cx="5394960" cy="685800"/>
+            <a:off x="594360" y="3337560"/>
+            <a:ext cx="5394960" cy="1051560"/>
           </a:xfrm>
           <a:prstGeom prst="rect">
             <a:avLst/>
@@ -6918,8 +7270,78 @@
         </p:nvSpPr>
         <p:spPr>
           <a:xfrm>
-            <a:off x="6263640" y="3474720"/>
-            <a:ext cx="5394960" cy="685800"/>
+            <a:off x="6263640" y="3337560"/>
+            <a:ext cx="5394960" cy="1051560"/>
+          </a:xfrm>
+          <a:prstGeom prst="rect">
+            <a:avLst/>
+          </a:prstGeom>
+          <a:noFill/>
+        </p:spPr>
+        <p:txBody>
+          <a:bodyPr wrap="square" lIns="18288" rIns="18288" tIns="9144" bIns="9144" anchor="ctr">
+            <a:spAutoFit/>
+          </a:bodyPr>
+          <a:lstStyle/>
+          <a:p>
+            <a:pPr algn="l"/>
+            <a:r>
+              <a:rPr sz="1600" b="0" i="0">
+                <a:solidFill>
+                  <a:srgbClr val="14181F"/>
+                </a:solidFill>
+                <a:latin typeface="Microsoft YaHei"/>
+              </a:rPr>
+              <a:t/>
+            </a:r>
+          </a:p>
+        </p:txBody>
+      </p:sp>
+      <p:sp>
+        <p:nvSpPr>
+          <p:cNvPr id="12" name="TextBox 11"/>
+          <p:cNvSpPr txBox="1"/>
+          <p:nvPr/>
+        </p:nvSpPr>
+        <p:spPr>
+          <a:xfrm>
+            <a:off x="594360" y="4892040"/>
+            <a:ext cx="5394960" cy="1051560"/>
+          </a:xfrm>
+          <a:prstGeom prst="rect">
+            <a:avLst/>
+          </a:prstGeom>
+          <a:noFill/>
+        </p:spPr>
+        <p:txBody>
+          <a:bodyPr wrap="square" lIns="18288" rIns="18288" tIns="9144" bIns="9144" anchor="ctr">
+            <a:spAutoFit/>
+          </a:bodyPr>
+          <a:lstStyle/>
+          <a:p>
+            <a:pPr algn="l"/>
+            <a:r>
+              <a:rPr sz="1600" b="0" i="0">
+                <a:solidFill>
+                  <a:srgbClr val="14181F"/>
+                </a:solidFill>
+                <a:latin typeface="Microsoft YaHei"/>
+              </a:rPr>
+              <a:t/>
+            </a:r>
+          </a:p>
+        </p:txBody>
+      </p:sp>
+      <p:sp>
+        <p:nvSpPr>
+          <p:cNvPr id="13" name="TextBox 12"/>
+          <p:cNvSpPr txBox="1"/>
+          <p:nvPr/>
+        </p:nvSpPr>
+        <p:spPr>
+          <a:xfrm>
+            <a:off x="6263640" y="4892040"/>
+            <a:ext cx="5394960" cy="1051560"/>
           </a:xfrm>
           <a:prstGeom prst="rect">
             <a:avLst/>
@@ -6980,7 +7402,7 @@
         <p:spPr>
           <a:xfrm>
             <a:off x="0" y="0"/>
-            <a:ext cx="118872" cy="6858000"/>
+            <a:ext cx="12191695" cy="91440"/>
           </a:xfrm>
           <a:prstGeom prst="rect">
             <a:avLst/>
@@ -7017,119 +7439,14 @@
       </p:sp>
       <p:sp>
         <p:nvSpPr>
-          <p:cNvPr id="3" name="TextBox 2"/>
-          <p:cNvSpPr txBox="1"/>
-          <p:nvPr/>
-        </p:nvSpPr>
-        <p:spPr>
-          <a:xfrm>
-            <a:off x="457200" y="6419088"/>
-            <a:ext cx="3657600" cy="274320"/>
-          </a:xfrm>
-          <a:prstGeom prst="rect">
-            <a:avLst/>
-          </a:prstGeom>
-          <a:noFill/>
-        </p:spPr>
-        <p:txBody>
-          <a:bodyPr wrap="none">
-            <a:spAutoFit/>
-          </a:bodyPr>
-          <a:lstStyle/>
-          <a:p>
-            <a:pPr algn="l"/>
-            <a:r>
-              <a:rPr sz="900" b="0">
-                <a:solidFill>
-                  <a:srgbClr val="6A7280"/>
-                </a:solidFill>
-                <a:latin typeface="Microsoft YaHei"/>
-              </a:rPr>
-              <a:t>LESSONFORGE 微课</a:t>
-            </a:r>
-          </a:p>
-        </p:txBody>
-      </p:sp>
-      <p:sp>
-        <p:nvSpPr>
-          <p:cNvPr id="4" name="TextBox 3"/>
-          <p:cNvSpPr txBox="1"/>
-          <p:nvPr/>
-        </p:nvSpPr>
-        <p:spPr>
-          <a:xfrm>
-            <a:off x="10607040" y="6419088"/>
-            <a:ext cx="1097280" cy="274320"/>
-          </a:xfrm>
-          <a:prstGeom prst="rect">
-            <a:avLst/>
-          </a:prstGeom>
-          <a:noFill/>
-        </p:spPr>
-        <p:txBody>
-          <a:bodyPr wrap="none">
-            <a:spAutoFit/>
-          </a:bodyPr>
-          <a:lstStyle/>
-          <a:p>
-            <a:pPr algn="r"/>
-            <a:r>
-              <a:rPr sz="1000" b="1">
-                <a:solidFill>
-                  <a:srgbClr val="6A7280"/>
-                </a:solidFill>
-                <a:latin typeface="Microsoft YaHei"/>
-              </a:rPr>
-              <a:t>05</a:t>
-            </a:r>
-          </a:p>
-        </p:txBody>
-      </p:sp>
-      <p:sp>
-        <p:nvSpPr>
-          <p:cNvPr id="5" name="TextBox 4"/>
-          <p:cNvSpPr txBox="1"/>
-          <p:nvPr/>
-        </p:nvSpPr>
-        <p:spPr>
-          <a:xfrm>
-            <a:off x="548640" y="457200"/>
-            <a:ext cx="11064240" cy="777240"/>
-          </a:xfrm>
-          <a:prstGeom prst="rect">
-            <a:avLst/>
-          </a:prstGeom>
-          <a:noFill/>
-        </p:spPr>
-        <p:txBody>
-          <a:bodyPr wrap="square" lIns="18288" rIns="18288" tIns="9144" bIns="9144" anchor="ctr">
-            <a:spAutoFit/>
-          </a:bodyPr>
-          <a:lstStyle/>
-          <a:p>
-            <a:pPr algn="l"/>
-            <a:r>
-              <a:rPr sz="2800" b="1" i="0">
-                <a:solidFill>
-                  <a:srgbClr val="0F2B4C"/>
-                </a:solidFill>
-                <a:latin typeface="Microsoft YaHei"/>
-              </a:rPr>
-              <a:t/>
-            </a:r>
-          </a:p>
-        </p:txBody>
-      </p:sp>
-      <p:sp>
-        <p:nvSpPr>
-          <p:cNvPr id="6" name="Rectangle 5"/>
+          <p:cNvPr id="3" name="Rectangle 2"/>
           <p:cNvSpPr/>
           <p:nvPr/>
         </p:nvSpPr>
         <p:spPr>
           <a:xfrm>
-            <a:off x="566928" y="1298448"/>
-            <a:ext cx="1234440" cy="82296"/>
+            <a:off x="594360" y="6263640"/>
+            <a:ext cx="10972800" cy="13716"/>
           </a:xfrm>
           <a:prstGeom prst="rect">
             <a:avLst/>
@@ -7166,14 +7483,84 @@
       </p:sp>
       <p:sp>
         <p:nvSpPr>
-          <p:cNvPr id="7" name="TextBox 6"/>
-          <p:cNvSpPr txBox="1"/>
-          <p:nvPr/>
-        </p:nvSpPr>
-        <p:spPr>
-          <a:xfrm>
-            <a:off x="594360" y="1645920"/>
-            <a:ext cx="10972800" cy="914400"/>
+          <p:cNvPr id="4" name="TextBox 3"/>
+          <p:cNvSpPr txBox="1"/>
+          <p:nvPr/>
+        </p:nvSpPr>
+        <p:spPr>
+          <a:xfrm>
+            <a:off x="457200" y="6419088"/>
+            <a:ext cx="3657600" cy="274320"/>
+          </a:xfrm>
+          <a:prstGeom prst="rect">
+            <a:avLst/>
+          </a:prstGeom>
+          <a:noFill/>
+        </p:spPr>
+        <p:txBody>
+          <a:bodyPr wrap="none">
+            <a:spAutoFit/>
+          </a:bodyPr>
+          <a:lstStyle/>
+          <a:p>
+            <a:pPr algn="l"/>
+            <a:r>
+              <a:rPr sz="900" b="0">
+                <a:solidFill>
+                  <a:srgbClr val="6A7280"/>
+                </a:solidFill>
+                <a:latin typeface="Microsoft YaHei"/>
+              </a:rPr>
+              <a:t>LESSONFORGE 微课</a:t>
+            </a:r>
+          </a:p>
+        </p:txBody>
+      </p:sp>
+      <p:sp>
+        <p:nvSpPr>
+          <p:cNvPr id="5" name="TextBox 4"/>
+          <p:cNvSpPr txBox="1"/>
+          <p:nvPr/>
+        </p:nvSpPr>
+        <p:spPr>
+          <a:xfrm>
+            <a:off x="10607040" y="6419088"/>
+            <a:ext cx="1097280" cy="274320"/>
+          </a:xfrm>
+          <a:prstGeom prst="rect">
+            <a:avLst/>
+          </a:prstGeom>
+          <a:noFill/>
+        </p:spPr>
+        <p:txBody>
+          <a:bodyPr wrap="none">
+            <a:spAutoFit/>
+          </a:bodyPr>
+          <a:lstStyle/>
+          <a:p>
+            <a:pPr algn="r"/>
+            <a:r>
+              <a:rPr sz="1000" b="1">
+                <a:solidFill>
+                  <a:srgbClr val="6A7280"/>
+                </a:solidFill>
+                <a:latin typeface="Microsoft YaHei"/>
+              </a:rPr>
+              <a:t>05</a:t>
+            </a:r>
+          </a:p>
+        </p:txBody>
+      </p:sp>
+      <p:sp>
+        <p:nvSpPr>
+          <p:cNvPr id="6" name="TextBox 5"/>
+          <p:cNvSpPr txBox="1"/>
+          <p:nvPr/>
+        </p:nvSpPr>
+        <p:spPr>
+          <a:xfrm>
+            <a:off x="594360" y="502920"/>
+            <a:ext cx="10789920" cy="731520"/>
           </a:xfrm>
           <a:prstGeom prst="rect">
             <a:avLst/>
@@ -7188,6 +7575,85 @@
           <a:p>
             <a:pPr algn="l"/>
             <a:r>
+              <a:rPr sz="2800" b="1" i="0">
+                <a:solidFill>
+                  <a:srgbClr val="0F2B4C"/>
+                </a:solidFill>
+                <a:latin typeface="Microsoft YaHei"/>
+              </a:rPr>
+              <a:t/>
+            </a:r>
+          </a:p>
+        </p:txBody>
+      </p:sp>
+      <p:sp>
+        <p:nvSpPr>
+          <p:cNvPr id="7" name="Rectangle 6"/>
+          <p:cNvSpPr/>
+          <p:nvPr/>
+        </p:nvSpPr>
+        <p:spPr>
+          <a:xfrm>
+            <a:off x="621792" y="1298448"/>
+            <a:ext cx="1234440" cy="82296"/>
+          </a:xfrm>
+          <a:prstGeom prst="rect">
+            <a:avLst/>
+          </a:prstGeom>
+          <a:solidFill>
+            <a:srgbClr val="0F2B4C"/>
+          </a:solidFill>
+          <a:ln>
+            <a:noFill/>
+          </a:ln>
+          <a:effectLst/>
+        </p:spPr>
+        <p:style>
+          <a:lnRef idx="1">
+            <a:schemeClr val="accent1"/>
+          </a:lnRef>
+          <a:fillRef idx="3">
+            <a:schemeClr val="accent1"/>
+          </a:fillRef>
+          <a:effectRef idx="2">
+            <a:schemeClr val="accent1"/>
+          </a:effectRef>
+          <a:fontRef idx="minor">
+            <a:schemeClr val="lt1"/>
+          </a:fontRef>
+        </p:style>
+        <p:txBody>
+          <a:bodyPr rtlCol="0" anchor="ctr"/>
+          <a:lstStyle/>
+          <a:p>
+            <a:pPr algn="ctr"/>
+          </a:p>
+        </p:txBody>
+      </p:sp>
+      <p:sp>
+        <p:nvSpPr>
+          <p:cNvPr id="8" name="TextBox 7"/>
+          <p:cNvSpPr txBox="1"/>
+          <p:nvPr/>
+        </p:nvSpPr>
+        <p:spPr>
+          <a:xfrm>
+            <a:off x="594360" y="1691640"/>
+            <a:ext cx="10972800" cy="868680"/>
+          </a:xfrm>
+          <a:prstGeom prst="rect">
+            <a:avLst/>
+          </a:prstGeom>
+          <a:noFill/>
+        </p:spPr>
+        <p:txBody>
+          <a:bodyPr wrap="square" lIns="18288" rIns="18288" tIns="9144" bIns="9144" anchor="ctr">
+            <a:spAutoFit/>
+          </a:bodyPr>
+          <a:lstStyle/>
+          <a:p>
+            <a:pPr algn="l"/>
+            <a:r>
               <a:rPr sz="1800" b="1" i="0">
                 <a:solidFill>
                   <a:srgbClr val="0F2B4C"/>
@@ -7201,14 +7667,14 @@
       </p:sp>
       <p:sp>
         <p:nvSpPr>
-          <p:cNvPr id="8" name="TextBox 7"/>
+          <p:cNvPr id="9" name="TextBox 8"/>
           <p:cNvSpPr txBox="1"/>
           <p:nvPr/>
         </p:nvSpPr>
         <p:spPr>
           <a:xfrm>
             <a:off x="594360" y="2743200"/>
-            <a:ext cx="5394960" cy="594360"/>
+            <a:ext cx="5394960" cy="731520"/>
           </a:xfrm>
           <a:prstGeom prst="rect">
             <a:avLst/>
@@ -7236,14 +7702,14 @@
       </p:sp>
       <p:sp>
         <p:nvSpPr>
-          <p:cNvPr id="9" name="TextBox 8"/>
+          <p:cNvPr id="10" name="TextBox 9"/>
           <p:cNvSpPr txBox="1"/>
           <p:nvPr/>
         </p:nvSpPr>
         <p:spPr>
           <a:xfrm>
             <a:off x="6263640" y="2743200"/>
-            <a:ext cx="5394960" cy="594360"/>
+            <a:ext cx="5394960" cy="731520"/>
           </a:xfrm>
           <a:prstGeom prst="rect">
             <a:avLst/>
@@ -7271,14 +7737,14 @@
       </p:sp>
       <p:sp>
         <p:nvSpPr>
-          <p:cNvPr id="10" name="TextBox 9"/>
-          <p:cNvSpPr txBox="1"/>
-          <p:nvPr/>
-        </p:nvSpPr>
-        <p:spPr>
-          <a:xfrm>
-            <a:off x="594360" y="3474720"/>
-            <a:ext cx="5394960" cy="594360"/>
+          <p:cNvPr id="11" name="TextBox 10"/>
+          <p:cNvSpPr txBox="1"/>
+          <p:nvPr/>
+        </p:nvSpPr>
+        <p:spPr>
+          <a:xfrm>
+            <a:off x="594360" y="3886200"/>
+            <a:ext cx="5394960" cy="731520"/>
           </a:xfrm>
           <a:prstGeom prst="rect">
             <a:avLst/>
@@ -7306,14 +7772,14 @@
       </p:sp>
       <p:sp>
         <p:nvSpPr>
-          <p:cNvPr id="11" name="TextBox 10"/>
-          <p:cNvSpPr txBox="1"/>
-          <p:nvPr/>
-        </p:nvSpPr>
-        <p:spPr>
-          <a:xfrm>
-            <a:off x="6263640" y="3474720"/>
-            <a:ext cx="5394960" cy="594360"/>
+          <p:cNvPr id="12" name="TextBox 11"/>
+          <p:cNvSpPr txBox="1"/>
+          <p:nvPr/>
+        </p:nvSpPr>
+        <p:spPr>
+          <a:xfrm>
+            <a:off x="6263640" y="3886200"/>
+            <a:ext cx="5394960" cy="731520"/>
           </a:xfrm>
           <a:prstGeom prst="rect">
             <a:avLst/>
@@ -7341,14 +7807,14 @@
       </p:sp>
       <p:sp>
         <p:nvSpPr>
-          <p:cNvPr id="12" name="TextBox 11"/>
-          <p:cNvSpPr txBox="1"/>
-          <p:nvPr/>
-        </p:nvSpPr>
-        <p:spPr>
-          <a:xfrm>
-            <a:off x="594360" y="4206240"/>
-            <a:ext cx="5394960" cy="594360"/>
+          <p:cNvPr id="13" name="TextBox 12"/>
+          <p:cNvSpPr txBox="1"/>
+          <p:nvPr/>
+        </p:nvSpPr>
+        <p:spPr>
+          <a:xfrm>
+            <a:off x="594360" y="5029200"/>
+            <a:ext cx="5394960" cy="731520"/>
           </a:xfrm>
           <a:prstGeom prst="rect">
             <a:avLst/>
@@ -7376,14 +7842,14 @@
       </p:sp>
       <p:sp>
         <p:nvSpPr>
-          <p:cNvPr id="13" name="TextBox 12"/>
-          <p:cNvSpPr txBox="1"/>
-          <p:nvPr/>
-        </p:nvSpPr>
-        <p:spPr>
-          <a:xfrm>
-            <a:off x="6263640" y="4206240"/>
-            <a:ext cx="5394960" cy="594360"/>
+          <p:cNvPr id="14" name="TextBox 13"/>
+          <p:cNvSpPr txBox="1"/>
+          <p:nvPr/>
+        </p:nvSpPr>
+        <p:spPr>
+          <a:xfrm>
+            <a:off x="6263640" y="5029200"/>
+            <a:ext cx="5394960" cy="731520"/>
           </a:xfrm>
           <a:prstGeom prst="rect">
             <a:avLst/>
@@ -7444,7 +7910,7 @@
         <p:spPr>
           <a:xfrm>
             <a:off x="0" y="0"/>
-            <a:ext cx="118872" cy="6858000"/>
+            <a:ext cx="12191695" cy="91440"/>
           </a:xfrm>
           <a:prstGeom prst="rect">
             <a:avLst/>
@@ -7481,119 +7947,14 @@
       </p:sp>
       <p:sp>
         <p:nvSpPr>
-          <p:cNvPr id="3" name="TextBox 2"/>
-          <p:cNvSpPr txBox="1"/>
-          <p:nvPr/>
-        </p:nvSpPr>
-        <p:spPr>
-          <a:xfrm>
-            <a:off x="457200" y="6419088"/>
-            <a:ext cx="3657600" cy="274320"/>
-          </a:xfrm>
-          <a:prstGeom prst="rect">
-            <a:avLst/>
-          </a:prstGeom>
-          <a:noFill/>
-        </p:spPr>
-        <p:txBody>
-          <a:bodyPr wrap="none">
-            <a:spAutoFit/>
-          </a:bodyPr>
-          <a:lstStyle/>
-          <a:p>
-            <a:pPr algn="l"/>
-            <a:r>
-              <a:rPr sz="900" b="0">
-                <a:solidFill>
-                  <a:srgbClr val="6A7280"/>
-                </a:solidFill>
-                <a:latin typeface="Microsoft YaHei"/>
-              </a:rPr>
-              <a:t>LESSONFORGE 微课</a:t>
-            </a:r>
-          </a:p>
-        </p:txBody>
-      </p:sp>
-      <p:sp>
-        <p:nvSpPr>
-          <p:cNvPr id="4" name="TextBox 3"/>
-          <p:cNvSpPr txBox="1"/>
-          <p:nvPr/>
-        </p:nvSpPr>
-        <p:spPr>
-          <a:xfrm>
-            <a:off x="10607040" y="6419088"/>
-            <a:ext cx="1097280" cy="274320"/>
-          </a:xfrm>
-          <a:prstGeom prst="rect">
-            <a:avLst/>
-          </a:prstGeom>
-          <a:noFill/>
-        </p:spPr>
-        <p:txBody>
-          <a:bodyPr wrap="none">
-            <a:spAutoFit/>
-          </a:bodyPr>
-          <a:lstStyle/>
-          <a:p>
-            <a:pPr algn="r"/>
-            <a:r>
-              <a:rPr sz="1000" b="1">
-                <a:solidFill>
-                  <a:srgbClr val="6A7280"/>
-                </a:solidFill>
-                <a:latin typeface="Microsoft YaHei"/>
-              </a:rPr>
-              <a:t>06</a:t>
-            </a:r>
-          </a:p>
-        </p:txBody>
-      </p:sp>
-      <p:sp>
-        <p:nvSpPr>
-          <p:cNvPr id="5" name="TextBox 4"/>
-          <p:cNvSpPr txBox="1"/>
-          <p:nvPr/>
-        </p:nvSpPr>
-        <p:spPr>
-          <a:xfrm>
-            <a:off x="548640" y="457200"/>
-            <a:ext cx="11064240" cy="777240"/>
-          </a:xfrm>
-          <a:prstGeom prst="rect">
-            <a:avLst/>
-          </a:prstGeom>
-          <a:noFill/>
-        </p:spPr>
-        <p:txBody>
-          <a:bodyPr wrap="square" lIns="18288" rIns="18288" tIns="9144" bIns="9144" anchor="ctr">
-            <a:spAutoFit/>
-          </a:bodyPr>
-          <a:lstStyle/>
-          <a:p>
-            <a:pPr algn="l"/>
-            <a:r>
-              <a:rPr sz="2800" b="1" i="0">
-                <a:solidFill>
-                  <a:srgbClr val="0F2B4C"/>
-                </a:solidFill>
-                <a:latin typeface="Microsoft YaHei"/>
-              </a:rPr>
-              <a:t/>
-            </a:r>
-          </a:p>
-        </p:txBody>
-      </p:sp>
-      <p:sp>
-        <p:nvSpPr>
-          <p:cNvPr id="6" name="Rectangle 5"/>
+          <p:cNvPr id="3" name="Rectangle 2"/>
           <p:cNvSpPr/>
           <p:nvPr/>
         </p:nvSpPr>
         <p:spPr>
           <a:xfrm>
-            <a:off x="566928" y="1298448"/>
-            <a:ext cx="1234440" cy="82296"/>
+            <a:off x="594360" y="6263640"/>
+            <a:ext cx="10972800" cy="13716"/>
           </a:xfrm>
           <a:prstGeom prst="rect">
             <a:avLst/>
@@ -7630,14 +7991,84 @@
       </p:sp>
       <p:sp>
         <p:nvSpPr>
-          <p:cNvPr id="7" name="TextBox 6"/>
-          <p:cNvSpPr txBox="1"/>
-          <p:nvPr/>
-        </p:nvSpPr>
-        <p:spPr>
-          <a:xfrm>
-            <a:off x="594360" y="1645920"/>
-            <a:ext cx="3200400" cy="457200"/>
+          <p:cNvPr id="4" name="TextBox 3"/>
+          <p:cNvSpPr txBox="1"/>
+          <p:nvPr/>
+        </p:nvSpPr>
+        <p:spPr>
+          <a:xfrm>
+            <a:off x="457200" y="6419088"/>
+            <a:ext cx="3657600" cy="274320"/>
+          </a:xfrm>
+          <a:prstGeom prst="rect">
+            <a:avLst/>
+          </a:prstGeom>
+          <a:noFill/>
+        </p:spPr>
+        <p:txBody>
+          <a:bodyPr wrap="none">
+            <a:spAutoFit/>
+          </a:bodyPr>
+          <a:lstStyle/>
+          <a:p>
+            <a:pPr algn="l"/>
+            <a:r>
+              <a:rPr sz="900" b="0">
+                <a:solidFill>
+                  <a:srgbClr val="6A7280"/>
+                </a:solidFill>
+                <a:latin typeface="Microsoft YaHei"/>
+              </a:rPr>
+              <a:t>LESSONFORGE 微课</a:t>
+            </a:r>
+          </a:p>
+        </p:txBody>
+      </p:sp>
+      <p:sp>
+        <p:nvSpPr>
+          <p:cNvPr id="5" name="TextBox 4"/>
+          <p:cNvSpPr txBox="1"/>
+          <p:nvPr/>
+        </p:nvSpPr>
+        <p:spPr>
+          <a:xfrm>
+            <a:off x="10607040" y="6419088"/>
+            <a:ext cx="1097280" cy="274320"/>
+          </a:xfrm>
+          <a:prstGeom prst="rect">
+            <a:avLst/>
+          </a:prstGeom>
+          <a:noFill/>
+        </p:spPr>
+        <p:txBody>
+          <a:bodyPr wrap="none">
+            <a:spAutoFit/>
+          </a:bodyPr>
+          <a:lstStyle/>
+          <a:p>
+            <a:pPr algn="r"/>
+            <a:r>
+              <a:rPr sz="1000" b="1">
+                <a:solidFill>
+                  <a:srgbClr val="6A7280"/>
+                </a:solidFill>
+                <a:latin typeface="Microsoft YaHei"/>
+              </a:rPr>
+              <a:t>06</a:t>
+            </a:r>
+          </a:p>
+        </p:txBody>
+      </p:sp>
+      <p:sp>
+        <p:nvSpPr>
+          <p:cNvPr id="6" name="TextBox 5"/>
+          <p:cNvSpPr txBox="1"/>
+          <p:nvPr/>
+        </p:nvSpPr>
+        <p:spPr>
+          <a:xfrm>
+            <a:off x="594360" y="502920"/>
+            <a:ext cx="10789920" cy="731520"/>
           </a:xfrm>
           <a:prstGeom prst="rect">
             <a:avLst/>
@@ -7652,6 +8083,85 @@
           <a:p>
             <a:pPr algn="l"/>
             <a:r>
+              <a:rPr sz="2800" b="1" i="0">
+                <a:solidFill>
+                  <a:srgbClr val="0F2B4C"/>
+                </a:solidFill>
+                <a:latin typeface="Microsoft YaHei"/>
+              </a:rPr>
+              <a:t/>
+            </a:r>
+          </a:p>
+        </p:txBody>
+      </p:sp>
+      <p:sp>
+        <p:nvSpPr>
+          <p:cNvPr id="7" name="Rectangle 6"/>
+          <p:cNvSpPr/>
+          <p:nvPr/>
+        </p:nvSpPr>
+        <p:spPr>
+          <a:xfrm>
+            <a:off x="621792" y="1298448"/>
+            <a:ext cx="1234440" cy="82296"/>
+          </a:xfrm>
+          <a:prstGeom prst="rect">
+            <a:avLst/>
+          </a:prstGeom>
+          <a:solidFill>
+            <a:srgbClr val="0F2B4C"/>
+          </a:solidFill>
+          <a:ln>
+            <a:noFill/>
+          </a:ln>
+          <a:effectLst/>
+        </p:spPr>
+        <p:style>
+          <a:lnRef idx="1">
+            <a:schemeClr val="accent1"/>
+          </a:lnRef>
+          <a:fillRef idx="3">
+            <a:schemeClr val="accent1"/>
+          </a:fillRef>
+          <a:effectRef idx="2">
+            <a:schemeClr val="accent1"/>
+          </a:effectRef>
+          <a:fontRef idx="minor">
+            <a:schemeClr val="lt1"/>
+          </a:fontRef>
+        </p:style>
+        <p:txBody>
+          <a:bodyPr rtlCol="0" anchor="ctr"/>
+          <a:lstStyle/>
+          <a:p>
+            <a:pPr algn="ctr"/>
+          </a:p>
+        </p:txBody>
+      </p:sp>
+      <p:sp>
+        <p:nvSpPr>
+          <p:cNvPr id="8" name="TextBox 7"/>
+          <p:cNvSpPr txBox="1"/>
+          <p:nvPr/>
+        </p:nvSpPr>
+        <p:spPr>
+          <a:xfrm>
+            <a:off x="594360" y="1691640"/>
+            <a:ext cx="2926080" cy="457200"/>
+          </a:xfrm>
+          <a:prstGeom prst="rect">
+            <a:avLst/>
+          </a:prstGeom>
+          <a:noFill/>
+        </p:spPr>
+        <p:txBody>
+          <a:bodyPr wrap="square" lIns="18288" rIns="18288" tIns="9144" bIns="9144" anchor="ctr">
+            <a:spAutoFit/>
+          </a:bodyPr>
+          <a:lstStyle/>
+          <a:p>
+            <a:pPr algn="l"/>
+            <a:r>
               <a:rPr sz="1400" b="1" i="0">
                 <a:solidFill>
                   <a:srgbClr val="0F2B4C"/>
@@ -7665,14 +8175,14 @@
       </p:sp>
       <p:sp>
         <p:nvSpPr>
-          <p:cNvPr id="8" name="TextBox 7"/>
-          <p:cNvSpPr txBox="1"/>
-          <p:nvPr/>
-        </p:nvSpPr>
-        <p:spPr>
-          <a:xfrm>
-            <a:off x="594360" y="2194560"/>
-            <a:ext cx="10972800" cy="731520"/>
+          <p:cNvPr id="9" name="TextBox 8"/>
+          <p:cNvSpPr txBox="1"/>
+          <p:nvPr/>
+        </p:nvSpPr>
+        <p:spPr>
+          <a:xfrm>
+            <a:off x="594360" y="2286000"/>
+            <a:ext cx="5394960" cy="960120"/>
           </a:xfrm>
           <a:prstGeom prst="rect">
             <a:avLst/>
@@ -7687,7 +8197,7 @@
           <a:p>
             <a:pPr algn="l"/>
             <a:r>
-              <a:rPr sz="1800" b="1" i="0">
+              <a:rPr sz="1600" b="0" i="0">
                 <a:solidFill>
                   <a:srgbClr val="14181F"/>
                 </a:solidFill>
@@ -7700,14 +8210,14 @@
       </p:sp>
       <p:sp>
         <p:nvSpPr>
-          <p:cNvPr id="9" name="TextBox 8"/>
-          <p:cNvSpPr txBox="1"/>
-          <p:nvPr/>
-        </p:nvSpPr>
-        <p:spPr>
-          <a:xfrm>
-            <a:off x="594360" y="3108960"/>
-            <a:ext cx="10972800" cy="594360"/>
+          <p:cNvPr id="10" name="TextBox 9"/>
+          <p:cNvSpPr txBox="1"/>
+          <p:nvPr/>
+        </p:nvSpPr>
+        <p:spPr>
+          <a:xfrm>
+            <a:off x="6263640" y="2286000"/>
+            <a:ext cx="5394960" cy="960120"/>
           </a:xfrm>
           <a:prstGeom prst="rect">
             <a:avLst/>
@@ -7735,14 +8245,14 @@
       </p:sp>
       <p:sp>
         <p:nvSpPr>
-          <p:cNvPr id="10" name="TextBox 9"/>
-          <p:cNvSpPr txBox="1"/>
-          <p:nvPr/>
-        </p:nvSpPr>
-        <p:spPr>
-          <a:xfrm>
-            <a:off x="594360" y="3822191"/>
-            <a:ext cx="10972800" cy="594360"/>
+          <p:cNvPr id="11" name="TextBox 10"/>
+          <p:cNvSpPr txBox="1"/>
+          <p:nvPr/>
+        </p:nvSpPr>
+        <p:spPr>
+          <a:xfrm>
+            <a:off x="594360" y="3703320"/>
+            <a:ext cx="5394960" cy="960120"/>
           </a:xfrm>
           <a:prstGeom prst="rect">
             <a:avLst/>
@@ -7770,14 +8280,14 @@
       </p:sp>
       <p:sp>
         <p:nvSpPr>
-          <p:cNvPr id="11" name="TextBox 10"/>
-          <p:cNvSpPr txBox="1"/>
-          <p:nvPr/>
-        </p:nvSpPr>
-        <p:spPr>
-          <a:xfrm>
-            <a:off x="594360" y="4535424"/>
-            <a:ext cx="10972800" cy="594360"/>
+          <p:cNvPr id="12" name="TextBox 11"/>
+          <p:cNvSpPr txBox="1"/>
+          <p:nvPr/>
+        </p:nvSpPr>
+        <p:spPr>
+          <a:xfrm>
+            <a:off x="6263640" y="3703320"/>
+            <a:ext cx="5394960" cy="960120"/>
           </a:xfrm>
           <a:prstGeom prst="rect">
             <a:avLst/>
@@ -7805,14 +8315,49 @@
       </p:sp>
       <p:sp>
         <p:nvSpPr>
-          <p:cNvPr id="12" name="TextBox 11"/>
-          <p:cNvSpPr txBox="1"/>
-          <p:nvPr/>
-        </p:nvSpPr>
-        <p:spPr>
-          <a:xfrm>
-            <a:off x="594360" y="5248656"/>
-            <a:ext cx="10972800" cy="594360"/>
+          <p:cNvPr id="13" name="TextBox 12"/>
+          <p:cNvSpPr txBox="1"/>
+          <p:nvPr/>
+        </p:nvSpPr>
+        <p:spPr>
+          <a:xfrm>
+            <a:off x="594360" y="5120640"/>
+            <a:ext cx="5394960" cy="960120"/>
+          </a:xfrm>
+          <a:prstGeom prst="rect">
+            <a:avLst/>
+          </a:prstGeom>
+          <a:noFill/>
+        </p:spPr>
+        <p:txBody>
+          <a:bodyPr wrap="square" lIns="18288" rIns="18288" tIns="9144" bIns="9144" anchor="ctr">
+            <a:spAutoFit/>
+          </a:bodyPr>
+          <a:lstStyle/>
+          <a:p>
+            <a:pPr algn="l"/>
+            <a:r>
+              <a:rPr sz="1600" b="0" i="0">
+                <a:solidFill>
+                  <a:srgbClr val="14181F"/>
+                </a:solidFill>
+                <a:latin typeface="Microsoft YaHei"/>
+              </a:rPr>
+              <a:t/>
+            </a:r>
+          </a:p>
+        </p:txBody>
+      </p:sp>
+      <p:sp>
+        <p:nvSpPr>
+          <p:cNvPr id="14" name="TextBox 13"/>
+          <p:cNvSpPr txBox="1"/>
+          <p:nvPr/>
+        </p:nvSpPr>
+        <p:spPr>
+          <a:xfrm>
+            <a:off x="6263640" y="5120640"/>
+            <a:ext cx="5394960" cy="960120"/>
           </a:xfrm>
           <a:prstGeom prst="rect">
             <a:avLst/>
@@ -7873,7 +8418,7 @@
         <p:spPr>
           <a:xfrm>
             <a:off x="0" y="0"/>
-            <a:ext cx="118872" cy="6858000"/>
+            <a:ext cx="12191695" cy="91440"/>
           </a:xfrm>
           <a:prstGeom prst="rect">
             <a:avLst/>
@@ -7910,119 +8455,14 @@
       </p:sp>
       <p:sp>
         <p:nvSpPr>
-          <p:cNvPr id="3" name="TextBox 2"/>
-          <p:cNvSpPr txBox="1"/>
-          <p:nvPr/>
-        </p:nvSpPr>
-        <p:spPr>
-          <a:xfrm>
-            <a:off x="457200" y="6419088"/>
-            <a:ext cx="3657600" cy="274320"/>
-          </a:xfrm>
-          <a:prstGeom prst="rect">
-            <a:avLst/>
-          </a:prstGeom>
-          <a:noFill/>
-        </p:spPr>
-        <p:txBody>
-          <a:bodyPr wrap="none">
-            <a:spAutoFit/>
-          </a:bodyPr>
-          <a:lstStyle/>
-          <a:p>
-            <a:pPr algn="l"/>
-            <a:r>
-              <a:rPr sz="900" b="0">
-                <a:solidFill>
-                  <a:srgbClr val="6A7280"/>
-                </a:solidFill>
-                <a:latin typeface="Microsoft YaHei"/>
-              </a:rPr>
-              <a:t>LESSONFORGE 微课</a:t>
-            </a:r>
-          </a:p>
-        </p:txBody>
-      </p:sp>
-      <p:sp>
-        <p:nvSpPr>
-          <p:cNvPr id="4" name="TextBox 3"/>
-          <p:cNvSpPr txBox="1"/>
-          <p:nvPr/>
-        </p:nvSpPr>
-        <p:spPr>
-          <a:xfrm>
-            <a:off x="10607040" y="6419088"/>
-            <a:ext cx="1097280" cy="274320"/>
-          </a:xfrm>
-          <a:prstGeom prst="rect">
-            <a:avLst/>
-          </a:prstGeom>
-          <a:noFill/>
-        </p:spPr>
-        <p:txBody>
-          <a:bodyPr wrap="none">
-            <a:spAutoFit/>
-          </a:bodyPr>
-          <a:lstStyle/>
-          <a:p>
-            <a:pPr algn="r"/>
-            <a:r>
-              <a:rPr sz="1000" b="1">
-                <a:solidFill>
-                  <a:srgbClr val="6A7280"/>
-                </a:solidFill>
-                <a:latin typeface="Microsoft YaHei"/>
-              </a:rPr>
-              <a:t>07</a:t>
-            </a:r>
-          </a:p>
-        </p:txBody>
-      </p:sp>
-      <p:sp>
-        <p:nvSpPr>
-          <p:cNvPr id="5" name="TextBox 4"/>
-          <p:cNvSpPr txBox="1"/>
-          <p:nvPr/>
-        </p:nvSpPr>
-        <p:spPr>
-          <a:xfrm>
-            <a:off x="548640" y="457200"/>
-            <a:ext cx="11064240" cy="777240"/>
-          </a:xfrm>
-          <a:prstGeom prst="rect">
-            <a:avLst/>
-          </a:prstGeom>
-          <a:noFill/>
-        </p:spPr>
-        <p:txBody>
-          <a:bodyPr wrap="square" lIns="18288" rIns="18288" tIns="9144" bIns="9144" anchor="ctr">
-            <a:spAutoFit/>
-          </a:bodyPr>
-          <a:lstStyle/>
-          <a:p>
-            <a:pPr algn="l"/>
-            <a:r>
-              <a:rPr sz="2800" b="1" i="0">
-                <a:solidFill>
-                  <a:srgbClr val="0F2B4C"/>
-                </a:solidFill>
-                <a:latin typeface="Microsoft YaHei"/>
-              </a:rPr>
-              <a:t/>
-            </a:r>
-          </a:p>
-        </p:txBody>
-      </p:sp>
-      <p:sp>
-        <p:nvSpPr>
-          <p:cNvPr id="6" name="Rectangle 5"/>
+          <p:cNvPr id="3" name="Rectangle 2"/>
           <p:cNvSpPr/>
           <p:nvPr/>
         </p:nvSpPr>
         <p:spPr>
           <a:xfrm>
-            <a:off x="566928" y="1298448"/>
-            <a:ext cx="1234440" cy="82296"/>
+            <a:off x="594360" y="6263640"/>
+            <a:ext cx="10972800" cy="13716"/>
           </a:xfrm>
           <a:prstGeom prst="rect">
             <a:avLst/>
@@ -8059,14 +8499,84 @@
       </p:sp>
       <p:sp>
         <p:nvSpPr>
-          <p:cNvPr id="7" name="TextBox 6"/>
-          <p:cNvSpPr txBox="1"/>
-          <p:nvPr/>
-        </p:nvSpPr>
-        <p:spPr>
-          <a:xfrm>
-            <a:off x="594360" y="1645920"/>
-            <a:ext cx="3200400" cy="457200"/>
+          <p:cNvPr id="4" name="TextBox 3"/>
+          <p:cNvSpPr txBox="1"/>
+          <p:nvPr/>
+        </p:nvSpPr>
+        <p:spPr>
+          <a:xfrm>
+            <a:off x="457200" y="6419088"/>
+            <a:ext cx="3657600" cy="274320"/>
+          </a:xfrm>
+          <a:prstGeom prst="rect">
+            <a:avLst/>
+          </a:prstGeom>
+          <a:noFill/>
+        </p:spPr>
+        <p:txBody>
+          <a:bodyPr wrap="none">
+            <a:spAutoFit/>
+          </a:bodyPr>
+          <a:lstStyle/>
+          <a:p>
+            <a:pPr algn="l"/>
+            <a:r>
+              <a:rPr sz="900" b="0">
+                <a:solidFill>
+                  <a:srgbClr val="6A7280"/>
+                </a:solidFill>
+                <a:latin typeface="Microsoft YaHei"/>
+              </a:rPr>
+              <a:t>LESSONFORGE 微课</a:t>
+            </a:r>
+          </a:p>
+        </p:txBody>
+      </p:sp>
+      <p:sp>
+        <p:nvSpPr>
+          <p:cNvPr id="5" name="TextBox 4"/>
+          <p:cNvSpPr txBox="1"/>
+          <p:nvPr/>
+        </p:nvSpPr>
+        <p:spPr>
+          <a:xfrm>
+            <a:off x="10607040" y="6419088"/>
+            <a:ext cx="1097280" cy="274320"/>
+          </a:xfrm>
+          <a:prstGeom prst="rect">
+            <a:avLst/>
+          </a:prstGeom>
+          <a:noFill/>
+        </p:spPr>
+        <p:txBody>
+          <a:bodyPr wrap="none">
+            <a:spAutoFit/>
+          </a:bodyPr>
+          <a:lstStyle/>
+          <a:p>
+            <a:pPr algn="r"/>
+            <a:r>
+              <a:rPr sz="1000" b="1">
+                <a:solidFill>
+                  <a:srgbClr val="6A7280"/>
+                </a:solidFill>
+                <a:latin typeface="Microsoft YaHei"/>
+              </a:rPr>
+              <a:t>07</a:t>
+            </a:r>
+          </a:p>
+        </p:txBody>
+      </p:sp>
+      <p:sp>
+        <p:nvSpPr>
+          <p:cNvPr id="6" name="TextBox 5"/>
+          <p:cNvSpPr txBox="1"/>
+          <p:nvPr/>
+        </p:nvSpPr>
+        <p:spPr>
+          <a:xfrm>
+            <a:off x="594360" y="502920"/>
+            <a:ext cx="10789920" cy="731520"/>
           </a:xfrm>
           <a:prstGeom prst="rect">
             <a:avLst/>
@@ -8081,6 +8591,85 @@
           <a:p>
             <a:pPr algn="l"/>
             <a:r>
+              <a:rPr sz="2800" b="1" i="0">
+                <a:solidFill>
+                  <a:srgbClr val="0F2B4C"/>
+                </a:solidFill>
+                <a:latin typeface="Microsoft YaHei"/>
+              </a:rPr>
+              <a:t/>
+            </a:r>
+          </a:p>
+        </p:txBody>
+      </p:sp>
+      <p:sp>
+        <p:nvSpPr>
+          <p:cNvPr id="7" name="Rectangle 6"/>
+          <p:cNvSpPr/>
+          <p:nvPr/>
+        </p:nvSpPr>
+        <p:spPr>
+          <a:xfrm>
+            <a:off x="621792" y="1298448"/>
+            <a:ext cx="1234440" cy="82296"/>
+          </a:xfrm>
+          <a:prstGeom prst="rect">
+            <a:avLst/>
+          </a:prstGeom>
+          <a:solidFill>
+            <a:srgbClr val="0F2B4C"/>
+          </a:solidFill>
+          <a:ln>
+            <a:noFill/>
+          </a:ln>
+          <a:effectLst/>
+        </p:spPr>
+        <p:style>
+          <a:lnRef idx="1">
+            <a:schemeClr val="accent1"/>
+          </a:lnRef>
+          <a:fillRef idx="3">
+            <a:schemeClr val="accent1"/>
+          </a:fillRef>
+          <a:effectRef idx="2">
+            <a:schemeClr val="accent1"/>
+          </a:effectRef>
+          <a:fontRef idx="minor">
+            <a:schemeClr val="lt1"/>
+          </a:fontRef>
+        </p:style>
+        <p:txBody>
+          <a:bodyPr rtlCol="0" anchor="ctr"/>
+          <a:lstStyle/>
+          <a:p>
+            <a:pPr algn="ctr"/>
+          </a:p>
+        </p:txBody>
+      </p:sp>
+      <p:sp>
+        <p:nvSpPr>
+          <p:cNvPr id="8" name="TextBox 7"/>
+          <p:cNvSpPr txBox="1"/>
+          <p:nvPr/>
+        </p:nvSpPr>
+        <p:spPr>
+          <a:xfrm>
+            <a:off x="594360" y="1691640"/>
+            <a:ext cx="2926080" cy="457200"/>
+          </a:xfrm>
+          <a:prstGeom prst="rect">
+            <a:avLst/>
+          </a:prstGeom>
+          <a:noFill/>
+        </p:spPr>
+        <p:txBody>
+          <a:bodyPr wrap="square" lIns="18288" rIns="18288" tIns="9144" bIns="9144" anchor="ctr">
+            <a:spAutoFit/>
+          </a:bodyPr>
+          <a:lstStyle/>
+          <a:p>
+            <a:pPr algn="l"/>
+            <a:r>
               <a:rPr sz="1400" b="1" i="0">
                 <a:solidFill>
                   <a:srgbClr val="0F2B4C"/>
@@ -8094,14 +8683,14 @@
       </p:sp>
       <p:sp>
         <p:nvSpPr>
-          <p:cNvPr id="8" name="TextBox 7"/>
-          <p:cNvSpPr txBox="1"/>
-          <p:nvPr/>
-        </p:nvSpPr>
-        <p:spPr>
-          <a:xfrm>
-            <a:off x="594360" y="2194560"/>
-            <a:ext cx="10972800" cy="731520"/>
+          <p:cNvPr id="9" name="TextBox 8"/>
+          <p:cNvSpPr txBox="1"/>
+          <p:nvPr/>
+        </p:nvSpPr>
+        <p:spPr>
+          <a:xfrm>
+            <a:off x="594360" y="2286000"/>
+            <a:ext cx="5394960" cy="960120"/>
           </a:xfrm>
           <a:prstGeom prst="rect">
             <a:avLst/>
@@ -8116,7 +8705,7 @@
           <a:p>
             <a:pPr algn="l"/>
             <a:r>
-              <a:rPr sz="1800" b="1" i="0">
+              <a:rPr sz="1600" b="0" i="0">
                 <a:solidFill>
                   <a:srgbClr val="14181F"/>
                 </a:solidFill>
@@ -8129,14 +8718,14 @@
       </p:sp>
       <p:sp>
         <p:nvSpPr>
-          <p:cNvPr id="9" name="TextBox 8"/>
-          <p:cNvSpPr txBox="1"/>
-          <p:nvPr/>
-        </p:nvSpPr>
-        <p:spPr>
-          <a:xfrm>
-            <a:off x="594360" y="3108960"/>
-            <a:ext cx="10972800" cy="594360"/>
+          <p:cNvPr id="10" name="TextBox 9"/>
+          <p:cNvSpPr txBox="1"/>
+          <p:nvPr/>
+        </p:nvSpPr>
+        <p:spPr>
+          <a:xfrm>
+            <a:off x="6263640" y="2286000"/>
+            <a:ext cx="5394960" cy="960120"/>
           </a:xfrm>
           <a:prstGeom prst="rect">
             <a:avLst/>
@@ -8164,14 +8753,14 @@
       </p:sp>
       <p:sp>
         <p:nvSpPr>
-          <p:cNvPr id="10" name="TextBox 9"/>
-          <p:cNvSpPr txBox="1"/>
-          <p:nvPr/>
-        </p:nvSpPr>
-        <p:spPr>
-          <a:xfrm>
-            <a:off x="594360" y="3822191"/>
-            <a:ext cx="10972800" cy="594360"/>
+          <p:cNvPr id="11" name="TextBox 10"/>
+          <p:cNvSpPr txBox="1"/>
+          <p:nvPr/>
+        </p:nvSpPr>
+        <p:spPr>
+          <a:xfrm>
+            <a:off x="594360" y="3703320"/>
+            <a:ext cx="5394960" cy="960120"/>
           </a:xfrm>
           <a:prstGeom prst="rect">
             <a:avLst/>
@@ -8199,14 +8788,14 @@
       </p:sp>
       <p:sp>
         <p:nvSpPr>
-          <p:cNvPr id="11" name="TextBox 10"/>
-          <p:cNvSpPr txBox="1"/>
-          <p:nvPr/>
-        </p:nvSpPr>
-        <p:spPr>
-          <a:xfrm>
-            <a:off x="594360" y="4535424"/>
-            <a:ext cx="10972800" cy="594360"/>
+          <p:cNvPr id="12" name="TextBox 11"/>
+          <p:cNvSpPr txBox="1"/>
+          <p:nvPr/>
+        </p:nvSpPr>
+        <p:spPr>
+          <a:xfrm>
+            <a:off x="6263640" y="3703320"/>
+            <a:ext cx="5394960" cy="960120"/>
           </a:xfrm>
           <a:prstGeom prst="rect">
             <a:avLst/>
@@ -8234,14 +8823,49 @@
       </p:sp>
       <p:sp>
         <p:nvSpPr>
-          <p:cNvPr id="12" name="TextBox 11"/>
-          <p:cNvSpPr txBox="1"/>
-          <p:nvPr/>
-        </p:nvSpPr>
-        <p:spPr>
-          <a:xfrm>
-            <a:off x="594360" y="5248656"/>
-            <a:ext cx="10972800" cy="594360"/>
+          <p:cNvPr id="13" name="TextBox 12"/>
+          <p:cNvSpPr txBox="1"/>
+          <p:nvPr/>
+        </p:nvSpPr>
+        <p:spPr>
+          <a:xfrm>
+            <a:off x="594360" y="5120640"/>
+            <a:ext cx="5394960" cy="960120"/>
+          </a:xfrm>
+          <a:prstGeom prst="rect">
+            <a:avLst/>
+          </a:prstGeom>
+          <a:noFill/>
+        </p:spPr>
+        <p:txBody>
+          <a:bodyPr wrap="square" lIns="18288" rIns="18288" tIns="9144" bIns="9144" anchor="ctr">
+            <a:spAutoFit/>
+          </a:bodyPr>
+          <a:lstStyle/>
+          <a:p>
+            <a:pPr algn="l"/>
+            <a:r>
+              <a:rPr sz="1600" b="0" i="0">
+                <a:solidFill>
+                  <a:srgbClr val="14181F"/>
+                </a:solidFill>
+                <a:latin typeface="Microsoft YaHei"/>
+              </a:rPr>
+              <a:t/>
+            </a:r>
+          </a:p>
+        </p:txBody>
+      </p:sp>
+      <p:sp>
+        <p:nvSpPr>
+          <p:cNvPr id="14" name="TextBox 13"/>
+          <p:cNvSpPr txBox="1"/>
+          <p:nvPr/>
+        </p:nvSpPr>
+        <p:spPr>
+          <a:xfrm>
+            <a:off x="6263640" y="5120640"/>
+            <a:ext cx="5394960" cy="960120"/>
           </a:xfrm>
           <a:prstGeom prst="rect">
             <a:avLst/>
@@ -8302,7 +8926,7 @@
         <p:spPr>
           <a:xfrm>
             <a:off x="0" y="0"/>
-            <a:ext cx="118872" cy="6858000"/>
+            <a:ext cx="12191695" cy="91440"/>
           </a:xfrm>
           <a:prstGeom prst="rect">
             <a:avLst/>
@@ -8339,119 +8963,14 @@
       </p:sp>
       <p:sp>
         <p:nvSpPr>
-          <p:cNvPr id="3" name="TextBox 2"/>
-          <p:cNvSpPr txBox="1"/>
-          <p:nvPr/>
-        </p:nvSpPr>
-        <p:spPr>
-          <a:xfrm>
-            <a:off x="457200" y="6419088"/>
-            <a:ext cx="3657600" cy="274320"/>
-          </a:xfrm>
-          <a:prstGeom prst="rect">
-            <a:avLst/>
-          </a:prstGeom>
-          <a:noFill/>
-        </p:spPr>
-        <p:txBody>
-          <a:bodyPr wrap="none">
-            <a:spAutoFit/>
-          </a:bodyPr>
-          <a:lstStyle/>
-          <a:p>
-            <a:pPr algn="l"/>
-            <a:r>
-              <a:rPr sz="900" b="0">
-                <a:solidFill>
-                  <a:srgbClr val="6A7280"/>
-                </a:solidFill>
-                <a:latin typeface="Microsoft YaHei"/>
-              </a:rPr>
-              <a:t>LESSONFORGE 微课</a:t>
-            </a:r>
-          </a:p>
-        </p:txBody>
-      </p:sp>
-      <p:sp>
-        <p:nvSpPr>
-          <p:cNvPr id="4" name="TextBox 3"/>
-          <p:cNvSpPr txBox="1"/>
-          <p:nvPr/>
-        </p:nvSpPr>
-        <p:spPr>
-          <a:xfrm>
-            <a:off x="10607040" y="6419088"/>
-            <a:ext cx="1097280" cy="274320"/>
-          </a:xfrm>
-          <a:prstGeom prst="rect">
-            <a:avLst/>
-          </a:prstGeom>
-          <a:noFill/>
-        </p:spPr>
-        <p:txBody>
-          <a:bodyPr wrap="none">
-            <a:spAutoFit/>
-          </a:bodyPr>
-          <a:lstStyle/>
-          <a:p>
-            <a:pPr algn="r"/>
-            <a:r>
-              <a:rPr sz="1000" b="1">
-                <a:solidFill>
-                  <a:srgbClr val="6A7280"/>
-                </a:solidFill>
-                <a:latin typeface="Microsoft YaHei"/>
-              </a:rPr>
-              <a:t>08</a:t>
-            </a:r>
-          </a:p>
-        </p:txBody>
-      </p:sp>
-      <p:sp>
-        <p:nvSpPr>
-          <p:cNvPr id="5" name="TextBox 4"/>
-          <p:cNvSpPr txBox="1"/>
-          <p:nvPr/>
-        </p:nvSpPr>
-        <p:spPr>
-          <a:xfrm>
-            <a:off x="548640" y="457200"/>
-            <a:ext cx="11064240" cy="777240"/>
-          </a:xfrm>
-          <a:prstGeom prst="rect">
-            <a:avLst/>
-          </a:prstGeom>
-          <a:noFill/>
-        </p:spPr>
-        <p:txBody>
-          <a:bodyPr wrap="square" lIns="18288" rIns="18288" tIns="9144" bIns="9144" anchor="ctr">
-            <a:spAutoFit/>
-          </a:bodyPr>
-          <a:lstStyle/>
-          <a:p>
-            <a:pPr algn="l"/>
-            <a:r>
-              <a:rPr sz="2800" b="1" i="0">
-                <a:solidFill>
-                  <a:srgbClr val="0F2B4C"/>
-                </a:solidFill>
-                <a:latin typeface="Microsoft YaHei"/>
-              </a:rPr>
-              <a:t/>
-            </a:r>
-          </a:p>
-        </p:txBody>
-      </p:sp>
-      <p:sp>
-        <p:nvSpPr>
-          <p:cNvPr id="6" name="Rectangle 5"/>
+          <p:cNvPr id="3" name="Rectangle 2"/>
           <p:cNvSpPr/>
           <p:nvPr/>
         </p:nvSpPr>
         <p:spPr>
           <a:xfrm>
-            <a:off x="566928" y="1298448"/>
-            <a:ext cx="1234440" cy="82296"/>
+            <a:off x="594360" y="6263640"/>
+            <a:ext cx="10972800" cy="13716"/>
           </a:xfrm>
           <a:prstGeom prst="rect">
             <a:avLst/>
@@ -8488,14 +9007,84 @@
       </p:sp>
       <p:sp>
         <p:nvSpPr>
-          <p:cNvPr id="7" name="TextBox 6"/>
-          <p:cNvSpPr txBox="1"/>
-          <p:nvPr/>
-        </p:nvSpPr>
-        <p:spPr>
-          <a:xfrm>
-            <a:off x="594360" y="1645920"/>
-            <a:ext cx="3200400" cy="457200"/>
+          <p:cNvPr id="4" name="TextBox 3"/>
+          <p:cNvSpPr txBox="1"/>
+          <p:nvPr/>
+        </p:nvSpPr>
+        <p:spPr>
+          <a:xfrm>
+            <a:off x="457200" y="6419088"/>
+            <a:ext cx="3657600" cy="274320"/>
+          </a:xfrm>
+          <a:prstGeom prst="rect">
+            <a:avLst/>
+          </a:prstGeom>
+          <a:noFill/>
+        </p:spPr>
+        <p:txBody>
+          <a:bodyPr wrap="none">
+            <a:spAutoFit/>
+          </a:bodyPr>
+          <a:lstStyle/>
+          <a:p>
+            <a:pPr algn="l"/>
+            <a:r>
+              <a:rPr sz="900" b="0">
+                <a:solidFill>
+                  <a:srgbClr val="6A7280"/>
+                </a:solidFill>
+                <a:latin typeface="Microsoft YaHei"/>
+              </a:rPr>
+              <a:t>LESSONFORGE 微课</a:t>
+            </a:r>
+          </a:p>
+        </p:txBody>
+      </p:sp>
+      <p:sp>
+        <p:nvSpPr>
+          <p:cNvPr id="5" name="TextBox 4"/>
+          <p:cNvSpPr txBox="1"/>
+          <p:nvPr/>
+        </p:nvSpPr>
+        <p:spPr>
+          <a:xfrm>
+            <a:off x="10607040" y="6419088"/>
+            <a:ext cx="1097280" cy="274320"/>
+          </a:xfrm>
+          <a:prstGeom prst="rect">
+            <a:avLst/>
+          </a:prstGeom>
+          <a:noFill/>
+        </p:spPr>
+        <p:txBody>
+          <a:bodyPr wrap="none">
+            <a:spAutoFit/>
+          </a:bodyPr>
+          <a:lstStyle/>
+          <a:p>
+            <a:pPr algn="r"/>
+            <a:r>
+              <a:rPr sz="1000" b="1">
+                <a:solidFill>
+                  <a:srgbClr val="6A7280"/>
+                </a:solidFill>
+                <a:latin typeface="Microsoft YaHei"/>
+              </a:rPr>
+              <a:t>08</a:t>
+            </a:r>
+          </a:p>
+        </p:txBody>
+      </p:sp>
+      <p:sp>
+        <p:nvSpPr>
+          <p:cNvPr id="6" name="TextBox 5"/>
+          <p:cNvSpPr txBox="1"/>
+          <p:nvPr/>
+        </p:nvSpPr>
+        <p:spPr>
+          <a:xfrm>
+            <a:off x="594360" y="502920"/>
+            <a:ext cx="10789920" cy="731520"/>
           </a:xfrm>
           <a:prstGeom prst="rect">
             <a:avLst/>
@@ -8510,6 +9099,85 @@
           <a:p>
             <a:pPr algn="l"/>
             <a:r>
+              <a:rPr sz="2800" b="1" i="0">
+                <a:solidFill>
+                  <a:srgbClr val="0F2B4C"/>
+                </a:solidFill>
+                <a:latin typeface="Microsoft YaHei"/>
+              </a:rPr>
+              <a:t/>
+            </a:r>
+          </a:p>
+        </p:txBody>
+      </p:sp>
+      <p:sp>
+        <p:nvSpPr>
+          <p:cNvPr id="7" name="Rectangle 6"/>
+          <p:cNvSpPr/>
+          <p:nvPr/>
+        </p:nvSpPr>
+        <p:spPr>
+          <a:xfrm>
+            <a:off x="621792" y="1298448"/>
+            <a:ext cx="1234440" cy="82296"/>
+          </a:xfrm>
+          <a:prstGeom prst="rect">
+            <a:avLst/>
+          </a:prstGeom>
+          <a:solidFill>
+            <a:srgbClr val="0F2B4C"/>
+          </a:solidFill>
+          <a:ln>
+            <a:noFill/>
+          </a:ln>
+          <a:effectLst/>
+        </p:spPr>
+        <p:style>
+          <a:lnRef idx="1">
+            <a:schemeClr val="accent1"/>
+          </a:lnRef>
+          <a:fillRef idx="3">
+            <a:schemeClr val="accent1"/>
+          </a:fillRef>
+          <a:effectRef idx="2">
+            <a:schemeClr val="accent1"/>
+          </a:effectRef>
+          <a:fontRef idx="minor">
+            <a:schemeClr val="lt1"/>
+          </a:fontRef>
+        </p:style>
+        <p:txBody>
+          <a:bodyPr rtlCol="0" anchor="ctr"/>
+          <a:lstStyle/>
+          <a:p>
+            <a:pPr algn="ctr"/>
+          </a:p>
+        </p:txBody>
+      </p:sp>
+      <p:sp>
+        <p:nvSpPr>
+          <p:cNvPr id="8" name="TextBox 7"/>
+          <p:cNvSpPr txBox="1"/>
+          <p:nvPr/>
+        </p:nvSpPr>
+        <p:spPr>
+          <a:xfrm>
+            <a:off x="594360" y="1691640"/>
+            <a:ext cx="2926080" cy="457200"/>
+          </a:xfrm>
+          <a:prstGeom prst="rect">
+            <a:avLst/>
+          </a:prstGeom>
+          <a:noFill/>
+        </p:spPr>
+        <p:txBody>
+          <a:bodyPr wrap="square" lIns="18288" rIns="18288" tIns="9144" bIns="9144" anchor="ctr">
+            <a:spAutoFit/>
+          </a:bodyPr>
+          <a:lstStyle/>
+          <a:p>
+            <a:pPr algn="l"/>
+            <a:r>
               <a:rPr sz="1400" b="1" i="0">
                 <a:solidFill>
                   <a:srgbClr val="0F2B4C"/>
@@ -8523,14 +9191,14 @@
       </p:sp>
       <p:sp>
         <p:nvSpPr>
-          <p:cNvPr id="8" name="TextBox 7"/>
-          <p:cNvSpPr txBox="1"/>
-          <p:nvPr/>
-        </p:nvSpPr>
-        <p:spPr>
-          <a:xfrm>
-            <a:off x="594360" y="2194560"/>
-            <a:ext cx="10972800" cy="731520"/>
+          <p:cNvPr id="9" name="TextBox 8"/>
+          <p:cNvSpPr txBox="1"/>
+          <p:nvPr/>
+        </p:nvSpPr>
+        <p:spPr>
+          <a:xfrm>
+            <a:off x="594360" y="2286000"/>
+            <a:ext cx="5394960" cy="960120"/>
           </a:xfrm>
           <a:prstGeom prst="rect">
             <a:avLst/>
@@ -8545,7 +9213,7 @@
           <a:p>
             <a:pPr algn="l"/>
             <a:r>
-              <a:rPr sz="1800" b="1" i="0">
+              <a:rPr sz="1600" b="0" i="0">
                 <a:solidFill>
                   <a:srgbClr val="14181F"/>
                 </a:solidFill>
@@ -8558,14 +9226,14 @@
       </p:sp>
       <p:sp>
         <p:nvSpPr>
-          <p:cNvPr id="9" name="TextBox 8"/>
-          <p:cNvSpPr txBox="1"/>
-          <p:nvPr/>
-        </p:nvSpPr>
-        <p:spPr>
-          <a:xfrm>
-            <a:off x="594360" y="3108960"/>
-            <a:ext cx="10972800" cy="594360"/>
+          <p:cNvPr id="10" name="TextBox 9"/>
+          <p:cNvSpPr txBox="1"/>
+          <p:nvPr/>
+        </p:nvSpPr>
+        <p:spPr>
+          <a:xfrm>
+            <a:off x="6263640" y="2286000"/>
+            <a:ext cx="5394960" cy="960120"/>
           </a:xfrm>
           <a:prstGeom prst="rect">
             <a:avLst/>
@@ -8593,14 +9261,14 @@
       </p:sp>
       <p:sp>
         <p:nvSpPr>
-          <p:cNvPr id="10" name="TextBox 9"/>
-          <p:cNvSpPr txBox="1"/>
-          <p:nvPr/>
-        </p:nvSpPr>
-        <p:spPr>
-          <a:xfrm>
-            <a:off x="594360" y="3822191"/>
-            <a:ext cx="10972800" cy="594360"/>
+          <p:cNvPr id="11" name="TextBox 10"/>
+          <p:cNvSpPr txBox="1"/>
+          <p:nvPr/>
+        </p:nvSpPr>
+        <p:spPr>
+          <a:xfrm>
+            <a:off x="594360" y="3703320"/>
+            <a:ext cx="5394960" cy="960120"/>
           </a:xfrm>
           <a:prstGeom prst="rect">
             <a:avLst/>
@@ -8628,14 +9296,14 @@
       </p:sp>
       <p:sp>
         <p:nvSpPr>
-          <p:cNvPr id="11" name="TextBox 10"/>
-          <p:cNvSpPr txBox="1"/>
-          <p:nvPr/>
-        </p:nvSpPr>
-        <p:spPr>
-          <a:xfrm>
-            <a:off x="594360" y="4535424"/>
-            <a:ext cx="10972800" cy="594360"/>
+          <p:cNvPr id="12" name="TextBox 11"/>
+          <p:cNvSpPr txBox="1"/>
+          <p:nvPr/>
+        </p:nvSpPr>
+        <p:spPr>
+          <a:xfrm>
+            <a:off x="6263640" y="3703320"/>
+            <a:ext cx="5394960" cy="960120"/>
           </a:xfrm>
           <a:prstGeom prst="rect">
             <a:avLst/>
@@ -8663,14 +9331,49 @@
       </p:sp>
       <p:sp>
         <p:nvSpPr>
-          <p:cNvPr id="12" name="TextBox 11"/>
-          <p:cNvSpPr txBox="1"/>
-          <p:nvPr/>
-        </p:nvSpPr>
-        <p:spPr>
-          <a:xfrm>
-            <a:off x="594360" y="5248656"/>
-            <a:ext cx="10972800" cy="594360"/>
+          <p:cNvPr id="13" name="TextBox 12"/>
+          <p:cNvSpPr txBox="1"/>
+          <p:nvPr/>
+        </p:nvSpPr>
+        <p:spPr>
+          <a:xfrm>
+            <a:off x="594360" y="5120640"/>
+            <a:ext cx="5394960" cy="960120"/>
+          </a:xfrm>
+          <a:prstGeom prst="rect">
+            <a:avLst/>
+          </a:prstGeom>
+          <a:noFill/>
+        </p:spPr>
+        <p:txBody>
+          <a:bodyPr wrap="square" lIns="18288" rIns="18288" tIns="9144" bIns="9144" anchor="ctr">
+            <a:spAutoFit/>
+          </a:bodyPr>
+          <a:lstStyle/>
+          <a:p>
+            <a:pPr algn="l"/>
+            <a:r>
+              <a:rPr sz="1600" b="0" i="0">
+                <a:solidFill>
+                  <a:srgbClr val="14181F"/>
+                </a:solidFill>
+                <a:latin typeface="Microsoft YaHei"/>
+              </a:rPr>
+              <a:t/>
+            </a:r>
+          </a:p>
+        </p:txBody>
+      </p:sp>
+      <p:sp>
+        <p:nvSpPr>
+          <p:cNvPr id="14" name="TextBox 13"/>
+          <p:cNvSpPr txBox="1"/>
+          <p:nvPr/>
+        </p:nvSpPr>
+        <p:spPr>
+          <a:xfrm>
+            <a:off x="6263640" y="5120640"/>
+            <a:ext cx="5394960" cy="960120"/>
           </a:xfrm>
           <a:prstGeom prst="rect">
             <a:avLst/>
@@ -8731,7 +9434,7 @@
         <p:spPr>
           <a:xfrm>
             <a:off x="0" y="0"/>
-            <a:ext cx="118872" cy="6858000"/>
+            <a:ext cx="12191695" cy="91440"/>
           </a:xfrm>
           <a:prstGeom prst="rect">
             <a:avLst/>
@@ -8768,119 +9471,14 @@
       </p:sp>
       <p:sp>
         <p:nvSpPr>
-          <p:cNvPr id="3" name="TextBox 2"/>
-          <p:cNvSpPr txBox="1"/>
-          <p:nvPr/>
-        </p:nvSpPr>
-        <p:spPr>
-          <a:xfrm>
-            <a:off x="457200" y="6419088"/>
-            <a:ext cx="3657600" cy="274320"/>
-          </a:xfrm>
-          <a:prstGeom prst="rect">
-            <a:avLst/>
-          </a:prstGeom>
-          <a:noFill/>
-        </p:spPr>
-        <p:txBody>
-          <a:bodyPr wrap="none">
-            <a:spAutoFit/>
-          </a:bodyPr>
-          <a:lstStyle/>
-          <a:p>
-            <a:pPr algn="l"/>
-            <a:r>
-              <a:rPr sz="900" b="0">
-                <a:solidFill>
-                  <a:srgbClr val="6A7280"/>
-                </a:solidFill>
-                <a:latin typeface="Microsoft YaHei"/>
-              </a:rPr>
-              <a:t>LESSONFORGE 微课</a:t>
-            </a:r>
-          </a:p>
-        </p:txBody>
-      </p:sp>
-      <p:sp>
-        <p:nvSpPr>
-          <p:cNvPr id="4" name="TextBox 3"/>
-          <p:cNvSpPr txBox="1"/>
-          <p:nvPr/>
-        </p:nvSpPr>
-        <p:spPr>
-          <a:xfrm>
-            <a:off x="10607040" y="6419088"/>
-            <a:ext cx="1097280" cy="274320"/>
-          </a:xfrm>
-          <a:prstGeom prst="rect">
-            <a:avLst/>
-          </a:prstGeom>
-          <a:noFill/>
-        </p:spPr>
-        <p:txBody>
-          <a:bodyPr wrap="none">
-            <a:spAutoFit/>
-          </a:bodyPr>
-          <a:lstStyle/>
-          <a:p>
-            <a:pPr algn="r"/>
-            <a:r>
-              <a:rPr sz="1000" b="1">
-                <a:solidFill>
-                  <a:srgbClr val="6A7280"/>
-                </a:solidFill>
-                <a:latin typeface="Microsoft YaHei"/>
-              </a:rPr>
-              <a:t>09</a:t>
-            </a:r>
-          </a:p>
-        </p:txBody>
-      </p:sp>
-      <p:sp>
-        <p:nvSpPr>
-          <p:cNvPr id="5" name="TextBox 4"/>
-          <p:cNvSpPr txBox="1"/>
-          <p:nvPr/>
-        </p:nvSpPr>
-        <p:spPr>
-          <a:xfrm>
-            <a:off x="548640" y="457200"/>
-            <a:ext cx="11064240" cy="777240"/>
-          </a:xfrm>
-          <a:prstGeom prst="rect">
-            <a:avLst/>
-          </a:prstGeom>
-          <a:noFill/>
-        </p:spPr>
-        <p:txBody>
-          <a:bodyPr wrap="square" lIns="18288" rIns="18288" tIns="9144" bIns="9144" anchor="ctr">
-            <a:spAutoFit/>
-          </a:bodyPr>
-          <a:lstStyle/>
-          <a:p>
-            <a:pPr algn="l"/>
-            <a:r>
-              <a:rPr sz="2800" b="1" i="0">
-                <a:solidFill>
-                  <a:srgbClr val="0F2B4C"/>
-                </a:solidFill>
-                <a:latin typeface="Microsoft YaHei"/>
-              </a:rPr>
-              <a:t/>
-            </a:r>
-          </a:p>
-        </p:txBody>
-      </p:sp>
-      <p:sp>
-        <p:nvSpPr>
-          <p:cNvPr id="6" name="Rectangle 5"/>
+          <p:cNvPr id="3" name="Rectangle 2"/>
           <p:cNvSpPr/>
           <p:nvPr/>
         </p:nvSpPr>
         <p:spPr>
           <a:xfrm>
-            <a:off x="566928" y="1298448"/>
-            <a:ext cx="1234440" cy="82296"/>
+            <a:off x="594360" y="6263640"/>
+            <a:ext cx="10972800" cy="13716"/>
           </a:xfrm>
           <a:prstGeom prst="rect">
             <a:avLst/>
@@ -8917,14 +9515,84 @@
       </p:sp>
       <p:sp>
         <p:nvSpPr>
-          <p:cNvPr id="7" name="TextBox 6"/>
-          <p:cNvSpPr txBox="1"/>
-          <p:nvPr/>
-        </p:nvSpPr>
-        <p:spPr>
-          <a:xfrm>
-            <a:off x="594360" y="1645920"/>
-            <a:ext cx="3200400" cy="457200"/>
+          <p:cNvPr id="4" name="TextBox 3"/>
+          <p:cNvSpPr txBox="1"/>
+          <p:nvPr/>
+        </p:nvSpPr>
+        <p:spPr>
+          <a:xfrm>
+            <a:off x="457200" y="6419088"/>
+            <a:ext cx="3657600" cy="274320"/>
+          </a:xfrm>
+          <a:prstGeom prst="rect">
+            <a:avLst/>
+          </a:prstGeom>
+          <a:noFill/>
+        </p:spPr>
+        <p:txBody>
+          <a:bodyPr wrap="none">
+            <a:spAutoFit/>
+          </a:bodyPr>
+          <a:lstStyle/>
+          <a:p>
+            <a:pPr algn="l"/>
+            <a:r>
+              <a:rPr sz="900" b="0">
+                <a:solidFill>
+                  <a:srgbClr val="6A7280"/>
+                </a:solidFill>
+                <a:latin typeface="Microsoft YaHei"/>
+              </a:rPr>
+              <a:t>LESSONFORGE 微课</a:t>
+            </a:r>
+          </a:p>
+        </p:txBody>
+      </p:sp>
+      <p:sp>
+        <p:nvSpPr>
+          <p:cNvPr id="5" name="TextBox 4"/>
+          <p:cNvSpPr txBox="1"/>
+          <p:nvPr/>
+        </p:nvSpPr>
+        <p:spPr>
+          <a:xfrm>
+            <a:off x="10607040" y="6419088"/>
+            <a:ext cx="1097280" cy="274320"/>
+          </a:xfrm>
+          <a:prstGeom prst="rect">
+            <a:avLst/>
+          </a:prstGeom>
+          <a:noFill/>
+        </p:spPr>
+        <p:txBody>
+          <a:bodyPr wrap="none">
+            <a:spAutoFit/>
+          </a:bodyPr>
+          <a:lstStyle/>
+          <a:p>
+            <a:pPr algn="r"/>
+            <a:r>
+              <a:rPr sz="1000" b="1">
+                <a:solidFill>
+                  <a:srgbClr val="6A7280"/>
+                </a:solidFill>
+                <a:latin typeface="Microsoft YaHei"/>
+              </a:rPr>
+              <a:t>09</a:t>
+            </a:r>
+          </a:p>
+        </p:txBody>
+      </p:sp>
+      <p:sp>
+        <p:nvSpPr>
+          <p:cNvPr id="6" name="TextBox 5"/>
+          <p:cNvSpPr txBox="1"/>
+          <p:nvPr/>
+        </p:nvSpPr>
+        <p:spPr>
+          <a:xfrm>
+            <a:off x="594360" y="502920"/>
+            <a:ext cx="10789920" cy="731520"/>
           </a:xfrm>
           <a:prstGeom prst="rect">
             <a:avLst/>
@@ -8939,6 +9607,85 @@
           <a:p>
             <a:pPr algn="l"/>
             <a:r>
+              <a:rPr sz="2800" b="1" i="0">
+                <a:solidFill>
+                  <a:srgbClr val="0F2B4C"/>
+                </a:solidFill>
+                <a:latin typeface="Microsoft YaHei"/>
+              </a:rPr>
+              <a:t/>
+            </a:r>
+          </a:p>
+        </p:txBody>
+      </p:sp>
+      <p:sp>
+        <p:nvSpPr>
+          <p:cNvPr id="7" name="Rectangle 6"/>
+          <p:cNvSpPr/>
+          <p:nvPr/>
+        </p:nvSpPr>
+        <p:spPr>
+          <a:xfrm>
+            <a:off x="621792" y="1298448"/>
+            <a:ext cx="1234440" cy="82296"/>
+          </a:xfrm>
+          <a:prstGeom prst="rect">
+            <a:avLst/>
+          </a:prstGeom>
+          <a:solidFill>
+            <a:srgbClr val="0F2B4C"/>
+          </a:solidFill>
+          <a:ln>
+            <a:noFill/>
+          </a:ln>
+          <a:effectLst/>
+        </p:spPr>
+        <p:style>
+          <a:lnRef idx="1">
+            <a:schemeClr val="accent1"/>
+          </a:lnRef>
+          <a:fillRef idx="3">
+            <a:schemeClr val="accent1"/>
+          </a:fillRef>
+          <a:effectRef idx="2">
+            <a:schemeClr val="accent1"/>
+          </a:effectRef>
+          <a:fontRef idx="minor">
+            <a:schemeClr val="lt1"/>
+          </a:fontRef>
+        </p:style>
+        <p:txBody>
+          <a:bodyPr rtlCol="0" anchor="ctr"/>
+          <a:lstStyle/>
+          <a:p>
+            <a:pPr algn="ctr"/>
+          </a:p>
+        </p:txBody>
+      </p:sp>
+      <p:sp>
+        <p:nvSpPr>
+          <p:cNvPr id="8" name="TextBox 7"/>
+          <p:cNvSpPr txBox="1"/>
+          <p:nvPr/>
+        </p:nvSpPr>
+        <p:spPr>
+          <a:xfrm>
+            <a:off x="594360" y="1691640"/>
+            <a:ext cx="2926080" cy="457200"/>
+          </a:xfrm>
+          <a:prstGeom prst="rect">
+            <a:avLst/>
+          </a:prstGeom>
+          <a:noFill/>
+        </p:spPr>
+        <p:txBody>
+          <a:bodyPr wrap="square" lIns="18288" rIns="18288" tIns="9144" bIns="9144" anchor="ctr">
+            <a:spAutoFit/>
+          </a:bodyPr>
+          <a:lstStyle/>
+          <a:p>
+            <a:pPr algn="l"/>
+            <a:r>
               <a:rPr sz="1400" b="1" i="0">
                 <a:solidFill>
                   <a:srgbClr val="0F2B4C"/>
@@ -8952,14 +9699,14 @@
       </p:sp>
       <p:sp>
         <p:nvSpPr>
-          <p:cNvPr id="8" name="TextBox 7"/>
-          <p:cNvSpPr txBox="1"/>
-          <p:nvPr/>
-        </p:nvSpPr>
-        <p:spPr>
-          <a:xfrm>
-            <a:off x="594360" y="2194560"/>
-            <a:ext cx="10972800" cy="731520"/>
+          <p:cNvPr id="9" name="TextBox 8"/>
+          <p:cNvSpPr txBox="1"/>
+          <p:nvPr/>
+        </p:nvSpPr>
+        <p:spPr>
+          <a:xfrm>
+            <a:off x="594360" y="2286000"/>
+            <a:ext cx="5394960" cy="960120"/>
           </a:xfrm>
           <a:prstGeom prst="rect">
             <a:avLst/>
@@ -8974,7 +9721,7 @@
           <a:p>
             <a:pPr algn="l"/>
             <a:r>
-              <a:rPr sz="1800" b="1" i="0">
+              <a:rPr sz="1600" b="0" i="0">
                 <a:solidFill>
                   <a:srgbClr val="14181F"/>
                 </a:solidFill>
@@ -8987,14 +9734,14 @@
       </p:sp>
       <p:sp>
         <p:nvSpPr>
-          <p:cNvPr id="9" name="TextBox 8"/>
-          <p:cNvSpPr txBox="1"/>
-          <p:nvPr/>
-        </p:nvSpPr>
-        <p:spPr>
-          <a:xfrm>
-            <a:off x="594360" y="3108960"/>
-            <a:ext cx="10972800" cy="594360"/>
+          <p:cNvPr id="10" name="TextBox 9"/>
+          <p:cNvSpPr txBox="1"/>
+          <p:nvPr/>
+        </p:nvSpPr>
+        <p:spPr>
+          <a:xfrm>
+            <a:off x="6263640" y="2286000"/>
+            <a:ext cx="5394960" cy="960120"/>
           </a:xfrm>
           <a:prstGeom prst="rect">
             <a:avLst/>
@@ -9022,14 +9769,14 @@
       </p:sp>
       <p:sp>
         <p:nvSpPr>
-          <p:cNvPr id="10" name="TextBox 9"/>
-          <p:cNvSpPr txBox="1"/>
-          <p:nvPr/>
-        </p:nvSpPr>
-        <p:spPr>
-          <a:xfrm>
-            <a:off x="594360" y="3822191"/>
-            <a:ext cx="10972800" cy="594360"/>
+          <p:cNvPr id="11" name="TextBox 10"/>
+          <p:cNvSpPr txBox="1"/>
+          <p:nvPr/>
+        </p:nvSpPr>
+        <p:spPr>
+          <a:xfrm>
+            <a:off x="594360" y="3703320"/>
+            <a:ext cx="5394960" cy="960120"/>
           </a:xfrm>
           <a:prstGeom prst="rect">
             <a:avLst/>
@@ -9057,14 +9804,14 @@
       </p:sp>
       <p:sp>
         <p:nvSpPr>
-          <p:cNvPr id="11" name="TextBox 10"/>
-          <p:cNvSpPr txBox="1"/>
-          <p:nvPr/>
-        </p:nvSpPr>
-        <p:spPr>
-          <a:xfrm>
-            <a:off x="594360" y="4535424"/>
-            <a:ext cx="10972800" cy="594360"/>
+          <p:cNvPr id="12" name="TextBox 11"/>
+          <p:cNvSpPr txBox="1"/>
+          <p:nvPr/>
+        </p:nvSpPr>
+        <p:spPr>
+          <a:xfrm>
+            <a:off x="6263640" y="3703320"/>
+            <a:ext cx="5394960" cy="960120"/>
           </a:xfrm>
           <a:prstGeom prst="rect">
             <a:avLst/>
@@ -9092,14 +9839,49 @@
       </p:sp>
       <p:sp>
         <p:nvSpPr>
-          <p:cNvPr id="12" name="TextBox 11"/>
-          <p:cNvSpPr txBox="1"/>
-          <p:nvPr/>
-        </p:nvSpPr>
-        <p:spPr>
-          <a:xfrm>
-            <a:off x="594360" y="5248656"/>
-            <a:ext cx="10972800" cy="594360"/>
+          <p:cNvPr id="13" name="TextBox 12"/>
+          <p:cNvSpPr txBox="1"/>
+          <p:nvPr/>
+        </p:nvSpPr>
+        <p:spPr>
+          <a:xfrm>
+            <a:off x="594360" y="5120640"/>
+            <a:ext cx="5394960" cy="960120"/>
+          </a:xfrm>
+          <a:prstGeom prst="rect">
+            <a:avLst/>
+          </a:prstGeom>
+          <a:noFill/>
+        </p:spPr>
+        <p:txBody>
+          <a:bodyPr wrap="square" lIns="18288" rIns="18288" tIns="9144" bIns="9144" anchor="ctr">
+            <a:spAutoFit/>
+          </a:bodyPr>
+          <a:lstStyle/>
+          <a:p>
+            <a:pPr algn="l"/>
+            <a:r>
+              <a:rPr sz="1600" b="0" i="0">
+                <a:solidFill>
+                  <a:srgbClr val="14181F"/>
+                </a:solidFill>
+                <a:latin typeface="Microsoft YaHei"/>
+              </a:rPr>
+              <a:t/>
+            </a:r>
+          </a:p>
+        </p:txBody>
+      </p:sp>
+      <p:sp>
+        <p:nvSpPr>
+          <p:cNvPr id="14" name="TextBox 13"/>
+          <p:cNvSpPr txBox="1"/>
+          <p:nvPr/>
+        </p:nvSpPr>
+        <p:spPr>
+          <a:xfrm>
+            <a:off x="6263640" y="5120640"/>
+            <a:ext cx="5394960" cy="960120"/>
           </a:xfrm>
           <a:prstGeom prst="rect">
             <a:avLst/>
